--- a/docs/pptx/entire/ritu-entire-linsubhr-disc-throm2.pptx
+++ b/docs/pptx/entire/ritu-entire-linsubhr-disc-throm2.pptx
@@ -3045,612 +3045,612 @@
           </p:nvSpPr>
           <p:spPr>
             <a:xfrm>
-              <a:off x="1172049" y="2794997"/>
-              <a:ext cx="7090630" cy="2301027"/>
+              <a:off x="1172049" y="2774335"/>
+              <a:ext cx="7090630" cy="2323362"/>
             </a:xfrm>
             <a:custGeom>
               <a:avLst/>
               <a:pathLst>
-                <a:path w="7090630" h="2301027">
+                <a:path w="7090630" h="2323362">
                   <a:moveTo>
                     <a:pt x="0" y="0"/>
                   </a:moveTo>
                   <a:lnTo>
-                    <a:pt x="71622" y="49492"/>
-                  </a:lnTo>
-                  <a:lnTo>
-                    <a:pt x="143245" y="98098"/>
-                  </a:lnTo>
-                  <a:lnTo>
-                    <a:pt x="214867" y="145833"/>
-                  </a:lnTo>
-                  <a:lnTo>
-                    <a:pt x="286490" y="192713"/>
-                  </a:lnTo>
-                  <a:lnTo>
-                    <a:pt x="358112" y="238752"/>
-                  </a:lnTo>
-                  <a:lnTo>
-                    <a:pt x="429735" y="283967"/>
-                  </a:lnTo>
-                  <a:lnTo>
-                    <a:pt x="501357" y="328372"/>
-                  </a:lnTo>
-                  <a:lnTo>
-                    <a:pt x="572980" y="371981"/>
-                  </a:lnTo>
-                  <a:lnTo>
-                    <a:pt x="644602" y="414808"/>
-                  </a:lnTo>
-                  <a:lnTo>
-                    <a:pt x="716225" y="456869"/>
-                  </a:lnTo>
-                  <a:lnTo>
-                    <a:pt x="787847" y="498175"/>
-                  </a:lnTo>
-                  <a:lnTo>
-                    <a:pt x="859470" y="538742"/>
-                  </a:lnTo>
-                  <a:lnTo>
-                    <a:pt x="931092" y="578582"/>
-                  </a:lnTo>
-                  <a:lnTo>
-                    <a:pt x="1002715" y="617708"/>
-                  </a:lnTo>
-                  <a:lnTo>
-                    <a:pt x="1074337" y="656132"/>
-                  </a:lnTo>
-                  <a:lnTo>
-                    <a:pt x="1145960" y="693869"/>
-                  </a:lnTo>
-                  <a:lnTo>
-                    <a:pt x="1217582" y="730929"/>
-                  </a:lnTo>
-                  <a:lnTo>
-                    <a:pt x="1289205" y="767325"/>
-                  </a:lnTo>
-                  <a:lnTo>
-                    <a:pt x="1360827" y="803069"/>
-                  </a:lnTo>
-                  <a:lnTo>
-                    <a:pt x="1432450" y="838173"/>
-                  </a:lnTo>
-                  <a:lnTo>
-                    <a:pt x="1504073" y="872648"/>
-                  </a:lnTo>
-                  <a:lnTo>
-                    <a:pt x="1575695" y="906505"/>
-                  </a:lnTo>
-                  <a:lnTo>
-                    <a:pt x="1647318" y="939755"/>
-                  </a:lnTo>
-                  <a:lnTo>
-                    <a:pt x="1718940" y="972409"/>
-                  </a:lnTo>
-                  <a:lnTo>
-                    <a:pt x="1790563" y="1004479"/>
-                  </a:lnTo>
-                  <a:lnTo>
-                    <a:pt x="1862185" y="1035974"/>
-                  </a:lnTo>
-                  <a:lnTo>
-                    <a:pt x="1933808" y="1066904"/>
-                  </a:lnTo>
-                  <a:lnTo>
-                    <a:pt x="2005430" y="1097281"/>
-                  </a:lnTo>
-                  <a:lnTo>
-                    <a:pt x="2077053" y="1127113"/>
-                  </a:lnTo>
-                  <a:lnTo>
-                    <a:pt x="2148675" y="1156410"/>
-                  </a:lnTo>
-                  <a:lnTo>
-                    <a:pt x="2220298" y="1185183"/>
-                  </a:lnTo>
-                  <a:lnTo>
-                    <a:pt x="2291920" y="1213440"/>
-                  </a:lnTo>
-                  <a:lnTo>
-                    <a:pt x="2363543" y="1241191"/>
-                  </a:lnTo>
-                  <a:lnTo>
-                    <a:pt x="2435165" y="1268445"/>
-                  </a:lnTo>
-                  <a:lnTo>
-                    <a:pt x="2506788" y="1295210"/>
-                  </a:lnTo>
-                  <a:lnTo>
-                    <a:pt x="2578410" y="1321496"/>
-                  </a:lnTo>
-                  <a:lnTo>
-                    <a:pt x="2650033" y="1347310"/>
-                  </a:lnTo>
-                  <a:lnTo>
-                    <a:pt x="2721655" y="1372663"/>
-                  </a:lnTo>
-                  <a:lnTo>
-                    <a:pt x="2793278" y="1397561"/>
-                  </a:lnTo>
-                  <a:lnTo>
-                    <a:pt x="2864901" y="1422012"/>
-                  </a:lnTo>
-                  <a:lnTo>
-                    <a:pt x="2936523" y="1446026"/>
-                  </a:lnTo>
-                  <a:lnTo>
-                    <a:pt x="3008146" y="1469610"/>
-                  </a:lnTo>
-                  <a:lnTo>
-                    <a:pt x="3079768" y="1492770"/>
-                  </a:lnTo>
-                  <a:lnTo>
-                    <a:pt x="3151391" y="1515516"/>
-                  </a:lnTo>
-                  <a:lnTo>
-                    <a:pt x="3223013" y="1537855"/>
-                  </a:lnTo>
-                  <a:lnTo>
-                    <a:pt x="3294636" y="1559793"/>
-                  </a:lnTo>
-                  <a:lnTo>
-                    <a:pt x="3366258" y="1581338"/>
-                  </a:lnTo>
-                  <a:lnTo>
-                    <a:pt x="3437881" y="1602497"/>
-                  </a:lnTo>
-                  <a:lnTo>
-                    <a:pt x="3509503" y="1623277"/>
-                  </a:lnTo>
-                  <a:lnTo>
-                    <a:pt x="3581126" y="1643684"/>
-                  </a:lnTo>
-                  <a:lnTo>
-                    <a:pt x="3652748" y="1663726"/>
-                  </a:lnTo>
-                  <a:lnTo>
-                    <a:pt x="3724371" y="1683409"/>
-                  </a:lnTo>
-                  <a:lnTo>
-                    <a:pt x="3795993" y="1702739"/>
-                  </a:lnTo>
-                  <a:lnTo>
-                    <a:pt x="3867616" y="1721723"/>
-                  </a:lnTo>
-                  <a:lnTo>
-                    <a:pt x="3939238" y="1740367"/>
-                  </a:lnTo>
-                  <a:lnTo>
-                    <a:pt x="4010861" y="1758676"/>
-                  </a:lnTo>
-                  <a:lnTo>
-                    <a:pt x="4082483" y="1776658"/>
-                  </a:lnTo>
-                  <a:lnTo>
-                    <a:pt x="4154106" y="1794317"/>
-                  </a:lnTo>
-                  <a:lnTo>
-                    <a:pt x="4225729" y="1811660"/>
-                  </a:lnTo>
-                  <a:lnTo>
-                    <a:pt x="4297351" y="1828692"/>
-                  </a:lnTo>
-                  <a:lnTo>
-                    <a:pt x="4368974" y="1845420"/>
-                  </a:lnTo>
-                  <a:lnTo>
-                    <a:pt x="4440596" y="1861847"/>
-                  </a:lnTo>
-                  <a:lnTo>
-                    <a:pt x="4512219" y="1877980"/>
-                  </a:lnTo>
-                  <a:lnTo>
-                    <a:pt x="4583841" y="1893824"/>
-                  </a:lnTo>
-                  <a:lnTo>
-                    <a:pt x="4655464" y="1909384"/>
-                  </a:lnTo>
-                  <a:lnTo>
-                    <a:pt x="4727086" y="1924665"/>
-                  </a:lnTo>
-                  <a:lnTo>
-                    <a:pt x="4798709" y="1934482"/>
-                  </a:lnTo>
-                  <a:lnTo>
-                    <a:pt x="4870331" y="1938144"/>
-                  </a:lnTo>
-                  <a:lnTo>
-                    <a:pt x="4941954" y="1941790"/>
-                  </a:lnTo>
-                  <a:lnTo>
-                    <a:pt x="5013576" y="1945420"/>
-                  </a:lnTo>
-                  <a:lnTo>
-                    <a:pt x="5085199" y="1949033"/>
-                  </a:lnTo>
-                  <a:lnTo>
-                    <a:pt x="5156821" y="1952631"/>
-                  </a:lnTo>
-                  <a:lnTo>
-                    <a:pt x="5228444" y="1956213"/>
-                  </a:lnTo>
-                  <a:lnTo>
-                    <a:pt x="5300066" y="1959779"/>
-                  </a:lnTo>
-                  <a:lnTo>
-                    <a:pt x="5371689" y="1963329"/>
-                  </a:lnTo>
-                  <a:lnTo>
-                    <a:pt x="5443311" y="1966864"/>
-                  </a:lnTo>
-                  <a:lnTo>
-                    <a:pt x="5514934" y="1970382"/>
-                  </a:lnTo>
-                  <a:lnTo>
-                    <a:pt x="5586557" y="1973886"/>
-                  </a:lnTo>
-                  <a:lnTo>
-                    <a:pt x="5658179" y="1977373"/>
-                  </a:lnTo>
-                  <a:lnTo>
-                    <a:pt x="5729802" y="1980846"/>
-                  </a:lnTo>
-                  <a:lnTo>
-                    <a:pt x="5801424" y="1984303"/>
-                  </a:lnTo>
-                  <a:lnTo>
-                    <a:pt x="5873047" y="1987744"/>
-                  </a:lnTo>
-                  <a:lnTo>
-                    <a:pt x="5944669" y="1991171"/>
-                  </a:lnTo>
-                  <a:lnTo>
-                    <a:pt x="6016292" y="1994582"/>
-                  </a:lnTo>
-                  <a:lnTo>
-                    <a:pt x="6087914" y="1997978"/>
-                  </a:lnTo>
-                  <a:lnTo>
-                    <a:pt x="6159537" y="2001360"/>
-                  </a:lnTo>
-                  <a:lnTo>
-                    <a:pt x="6231159" y="2004726"/>
-                  </a:lnTo>
-                  <a:lnTo>
-                    <a:pt x="6302782" y="2008077"/>
-                  </a:lnTo>
-                  <a:lnTo>
-                    <a:pt x="6374404" y="2011414"/>
-                  </a:lnTo>
-                  <a:lnTo>
-                    <a:pt x="6446027" y="2014735"/>
-                  </a:lnTo>
-                  <a:lnTo>
-                    <a:pt x="6517649" y="2018042"/>
-                  </a:lnTo>
-                  <a:lnTo>
-                    <a:pt x="6589272" y="2021335"/>
-                  </a:lnTo>
-                  <a:lnTo>
-                    <a:pt x="6660894" y="2024613"/>
-                  </a:lnTo>
-                  <a:lnTo>
-                    <a:pt x="6732517" y="2027876"/>
-                  </a:lnTo>
-                  <a:lnTo>
-                    <a:pt x="6804139" y="2031125"/>
-                  </a:lnTo>
-                  <a:lnTo>
-                    <a:pt x="6875762" y="2034360"/>
-                  </a:lnTo>
-                  <a:lnTo>
-                    <a:pt x="6947385" y="2037580"/>
-                  </a:lnTo>
-                  <a:lnTo>
-                    <a:pt x="7019007" y="2040786"/>
-                  </a:lnTo>
-                  <a:lnTo>
-                    <a:pt x="7090630" y="2043978"/>
-                  </a:lnTo>
-                  <a:lnTo>
-                    <a:pt x="7090630" y="2301027"/>
-                  </a:lnTo>
-                  <a:lnTo>
-                    <a:pt x="7019007" y="2292612"/>
-                  </a:lnTo>
-                  <a:lnTo>
-                    <a:pt x="6947385" y="2284044"/>
-                  </a:lnTo>
-                  <a:lnTo>
-                    <a:pt x="6875762" y="2275319"/>
-                  </a:lnTo>
-                  <a:lnTo>
-                    <a:pt x="6804139" y="2266435"/>
-                  </a:lnTo>
-                  <a:lnTo>
-                    <a:pt x="6732517" y="2257389"/>
-                  </a:lnTo>
-                  <a:lnTo>
-                    <a:pt x="6660894" y="2248178"/>
-                  </a:lnTo>
-                  <a:lnTo>
-                    <a:pt x="6589272" y="2238799"/>
-                  </a:lnTo>
-                  <a:lnTo>
-                    <a:pt x="6517649" y="2229249"/>
-                  </a:lnTo>
-                  <a:lnTo>
-                    <a:pt x="6446027" y="2219525"/>
-                  </a:lnTo>
-                  <a:lnTo>
-                    <a:pt x="6374404" y="2209623"/>
-                  </a:lnTo>
-                  <a:lnTo>
-                    <a:pt x="6302782" y="2199541"/>
-                  </a:lnTo>
-                  <a:lnTo>
-                    <a:pt x="6231159" y="2189275"/>
-                  </a:lnTo>
-                  <a:lnTo>
-                    <a:pt x="6159537" y="2178821"/>
-                  </a:lnTo>
-                  <a:lnTo>
-                    <a:pt x="6087914" y="2168177"/>
-                  </a:lnTo>
-                  <a:lnTo>
-                    <a:pt x="6016292" y="2157338"/>
-                  </a:lnTo>
-                  <a:lnTo>
-                    <a:pt x="5944669" y="2146302"/>
-                  </a:lnTo>
-                  <a:lnTo>
-                    <a:pt x="5873047" y="2135064"/>
-                  </a:lnTo>
-                  <a:lnTo>
-                    <a:pt x="5801424" y="2123622"/>
-                  </a:lnTo>
-                  <a:lnTo>
-                    <a:pt x="5729802" y="2111970"/>
-                  </a:lnTo>
-                  <a:lnTo>
-                    <a:pt x="5658179" y="2100106"/>
-                  </a:lnTo>
-                  <a:lnTo>
-                    <a:pt x="5586557" y="2088026"/>
-                  </a:lnTo>
-                  <a:lnTo>
-                    <a:pt x="5514934" y="2075725"/>
-                  </a:lnTo>
-                  <a:lnTo>
-                    <a:pt x="5443311" y="2063200"/>
-                  </a:lnTo>
-                  <a:lnTo>
-                    <a:pt x="5371689" y="2050446"/>
-                  </a:lnTo>
-                  <a:lnTo>
-                    <a:pt x="5300066" y="2037459"/>
-                  </a:lnTo>
-                  <a:lnTo>
-                    <a:pt x="5228444" y="2024236"/>
-                  </a:lnTo>
-                  <a:lnTo>
-                    <a:pt x="5156821" y="2010771"/>
-                  </a:lnTo>
-                  <a:lnTo>
-                    <a:pt x="5085199" y="1997061"/>
-                  </a:lnTo>
-                  <a:lnTo>
-                    <a:pt x="5013576" y="1983101"/>
-                  </a:lnTo>
-                  <a:lnTo>
-                    <a:pt x="4941954" y="1968886"/>
-                  </a:lnTo>
-                  <a:lnTo>
-                    <a:pt x="4870331" y="1954411"/>
-                  </a:lnTo>
-                  <a:lnTo>
-                    <a:pt x="4798709" y="1939673"/>
-                  </a:lnTo>
-                  <a:lnTo>
-                    <a:pt x="4727086" y="1930804"/>
-                  </a:lnTo>
-                  <a:lnTo>
-                    <a:pt x="4655464" y="1927109"/>
-                  </a:lnTo>
-                  <a:lnTo>
-                    <a:pt x="4583841" y="1923398"/>
-                  </a:lnTo>
-                  <a:lnTo>
-                    <a:pt x="4512219" y="1919670"/>
-                  </a:lnTo>
-                  <a:lnTo>
-                    <a:pt x="4440596" y="1915926"/>
-                  </a:lnTo>
-                  <a:lnTo>
-                    <a:pt x="4368974" y="1912165"/>
-                  </a:lnTo>
-                  <a:lnTo>
-                    <a:pt x="4297351" y="1908387"/>
-                  </a:lnTo>
-                  <a:lnTo>
-                    <a:pt x="4225729" y="1904593"/>
-                  </a:lnTo>
-                  <a:lnTo>
-                    <a:pt x="4154106" y="1900782"/>
-                  </a:lnTo>
-                  <a:lnTo>
-                    <a:pt x="4082483" y="1896954"/>
-                  </a:lnTo>
-                  <a:lnTo>
-                    <a:pt x="4010861" y="1893109"/>
-                  </a:lnTo>
-                  <a:lnTo>
-                    <a:pt x="3939238" y="1889246"/>
-                  </a:lnTo>
-                  <a:lnTo>
-                    <a:pt x="3867616" y="1885367"/>
-                  </a:lnTo>
-                  <a:lnTo>
-                    <a:pt x="3795993" y="1881470"/>
-                  </a:lnTo>
-                  <a:lnTo>
-                    <a:pt x="3724371" y="1877557"/>
-                  </a:lnTo>
-                  <a:lnTo>
-                    <a:pt x="3652748" y="1873625"/>
-                  </a:lnTo>
-                  <a:lnTo>
-                    <a:pt x="3581126" y="1869676"/>
-                  </a:lnTo>
-                  <a:lnTo>
-                    <a:pt x="3509503" y="1865710"/>
-                  </a:lnTo>
-                  <a:lnTo>
-                    <a:pt x="3437881" y="1861726"/>
-                  </a:lnTo>
-                  <a:lnTo>
-                    <a:pt x="3366258" y="1857724"/>
-                  </a:lnTo>
-                  <a:lnTo>
-                    <a:pt x="3294636" y="1853705"/>
-                  </a:lnTo>
-                  <a:lnTo>
-                    <a:pt x="3223013" y="1849668"/>
-                  </a:lnTo>
-                  <a:lnTo>
-                    <a:pt x="3151391" y="1845612"/>
-                  </a:lnTo>
-                  <a:lnTo>
-                    <a:pt x="3079768" y="1841539"/>
-                  </a:lnTo>
-                  <a:lnTo>
-                    <a:pt x="3008146" y="1837448"/>
-                  </a:lnTo>
-                  <a:lnTo>
-                    <a:pt x="2936523" y="1833338"/>
-                  </a:lnTo>
-                  <a:lnTo>
-                    <a:pt x="2864901" y="1829210"/>
-                  </a:lnTo>
-                  <a:lnTo>
-                    <a:pt x="2793278" y="1825064"/>
-                  </a:lnTo>
-                  <a:lnTo>
-                    <a:pt x="2721655" y="1820900"/>
-                  </a:lnTo>
-                  <a:lnTo>
-                    <a:pt x="2650033" y="1816716"/>
-                  </a:lnTo>
-                  <a:lnTo>
-                    <a:pt x="2578410" y="1812515"/>
-                  </a:lnTo>
-                  <a:lnTo>
-                    <a:pt x="2506788" y="1808294"/>
-                  </a:lnTo>
-                  <a:lnTo>
-                    <a:pt x="2435165" y="1804055"/>
-                  </a:lnTo>
-                  <a:lnTo>
-                    <a:pt x="2363543" y="1799797"/>
-                  </a:lnTo>
-                  <a:lnTo>
-                    <a:pt x="2291920" y="1795520"/>
-                  </a:lnTo>
-                  <a:lnTo>
-                    <a:pt x="2220298" y="1791225"/>
-                  </a:lnTo>
-                  <a:lnTo>
-                    <a:pt x="2148675" y="1786910"/>
-                  </a:lnTo>
-                  <a:lnTo>
-                    <a:pt x="2077053" y="1782575"/>
-                  </a:lnTo>
-                  <a:lnTo>
-                    <a:pt x="2005430" y="1778222"/>
-                  </a:lnTo>
-                  <a:lnTo>
-                    <a:pt x="1933808" y="1773849"/>
-                  </a:lnTo>
-                  <a:lnTo>
-                    <a:pt x="1862185" y="1769457"/>
-                  </a:lnTo>
-                  <a:lnTo>
-                    <a:pt x="1790563" y="1765045"/>
-                  </a:lnTo>
-                  <a:lnTo>
-                    <a:pt x="1718940" y="1760614"/>
-                  </a:lnTo>
-                  <a:lnTo>
-                    <a:pt x="1647318" y="1756163"/>
-                  </a:lnTo>
-                  <a:lnTo>
-                    <a:pt x="1575695" y="1751692"/>
-                  </a:lnTo>
-                  <a:lnTo>
-                    <a:pt x="1504073" y="1747202"/>
-                  </a:lnTo>
-                  <a:lnTo>
-                    <a:pt x="1432450" y="1742691"/>
-                  </a:lnTo>
-                  <a:lnTo>
-                    <a:pt x="1360827" y="1738160"/>
-                  </a:lnTo>
-                  <a:lnTo>
-                    <a:pt x="1289205" y="1733610"/>
-                  </a:lnTo>
-                  <a:lnTo>
-                    <a:pt x="1217582" y="1729039"/>
-                  </a:lnTo>
-                  <a:lnTo>
-                    <a:pt x="1145960" y="1724447"/>
-                  </a:lnTo>
-                  <a:lnTo>
-                    <a:pt x="1074337" y="1719836"/>
-                  </a:lnTo>
-                  <a:lnTo>
-                    <a:pt x="1002715" y="1715204"/>
-                  </a:lnTo>
-                  <a:lnTo>
-                    <a:pt x="931092" y="1710551"/>
-                  </a:lnTo>
-                  <a:lnTo>
-                    <a:pt x="859470" y="1705877"/>
-                  </a:lnTo>
-                  <a:lnTo>
-                    <a:pt x="787847" y="1701183"/>
-                  </a:lnTo>
-                  <a:lnTo>
-                    <a:pt x="716225" y="1696468"/>
-                  </a:lnTo>
-                  <a:lnTo>
-                    <a:pt x="644602" y="1691732"/>
-                  </a:lnTo>
-                  <a:lnTo>
-                    <a:pt x="572980" y="1686975"/>
-                  </a:lnTo>
-                  <a:lnTo>
-                    <a:pt x="501357" y="1682197"/>
-                  </a:lnTo>
-                  <a:lnTo>
-                    <a:pt x="429735" y="1677397"/>
-                  </a:lnTo>
-                  <a:lnTo>
-                    <a:pt x="358112" y="1672576"/>
-                  </a:lnTo>
-                  <a:lnTo>
-                    <a:pt x="286490" y="1667734"/>
-                  </a:lnTo>
-                  <a:lnTo>
-                    <a:pt x="214867" y="1662870"/>
-                  </a:lnTo>
-                  <a:lnTo>
-                    <a:pt x="143245" y="1657985"/>
-                  </a:lnTo>
-                  <a:lnTo>
-                    <a:pt x="71622" y="1653078"/>
-                  </a:lnTo>
-                  <a:lnTo>
-                    <a:pt x="0" y="1648149"/>
+                    <a:pt x="71622" y="50168"/>
+                  </a:lnTo>
+                  <a:lnTo>
+                    <a:pt x="143245" y="99433"/>
+                  </a:lnTo>
+                  <a:lnTo>
+                    <a:pt x="214867" y="147809"/>
+                  </a:lnTo>
+                  <a:lnTo>
+                    <a:pt x="286490" y="195314"/>
+                  </a:lnTo>
+                  <a:lnTo>
+                    <a:pt x="358112" y="241961"/>
+                  </a:lnTo>
+                  <a:lnTo>
+                    <a:pt x="429735" y="287768"/>
+                  </a:lnTo>
+                  <a:lnTo>
+                    <a:pt x="501357" y="332750"/>
+                  </a:lnTo>
+                  <a:lnTo>
+                    <a:pt x="572980" y="376920"/>
+                  </a:lnTo>
+                  <a:lnTo>
+                    <a:pt x="644602" y="420294"/>
+                  </a:lnTo>
+                  <a:lnTo>
+                    <a:pt x="716225" y="462886"/>
+                  </a:lnTo>
+                  <a:lnTo>
+                    <a:pt x="787847" y="504710"/>
+                  </a:lnTo>
+                  <a:lnTo>
+                    <a:pt x="859470" y="545780"/>
+                  </a:lnTo>
+                  <a:lnTo>
+                    <a:pt x="931092" y="586110"/>
+                  </a:lnTo>
+                  <a:lnTo>
+                    <a:pt x="1002715" y="625713"/>
+                  </a:lnTo>
+                  <a:lnTo>
+                    <a:pt x="1074337" y="664602"/>
+                  </a:lnTo>
+                  <a:lnTo>
+                    <a:pt x="1145960" y="702790"/>
+                  </a:lnTo>
+                  <a:lnTo>
+                    <a:pt x="1217582" y="740289"/>
+                  </a:lnTo>
+                  <a:lnTo>
+                    <a:pt x="1289205" y="777113"/>
+                  </a:lnTo>
+                  <a:lnTo>
+                    <a:pt x="1360827" y="813272"/>
+                  </a:lnTo>
+                  <a:lnTo>
+                    <a:pt x="1432450" y="848780"/>
+                  </a:lnTo>
+                  <a:lnTo>
+                    <a:pt x="1504073" y="883647"/>
+                  </a:lnTo>
+                  <a:lnTo>
+                    <a:pt x="1575695" y="917886"/>
+                  </a:lnTo>
+                  <a:lnTo>
+                    <a:pt x="1647318" y="951508"/>
+                  </a:lnTo>
+                  <a:lnTo>
+                    <a:pt x="1718940" y="984524"/>
+                  </a:lnTo>
+                  <a:lnTo>
+                    <a:pt x="1790563" y="1016944"/>
+                  </a:lnTo>
+                  <a:lnTo>
+                    <a:pt x="1862185" y="1048780"/>
+                  </a:lnTo>
+                  <a:lnTo>
+                    <a:pt x="1933808" y="1080042"/>
+                  </a:lnTo>
+                  <a:lnTo>
+                    <a:pt x="2005430" y="1110741"/>
+                  </a:lnTo>
+                  <a:lnTo>
+                    <a:pt x="2077053" y="1140886"/>
+                  </a:lnTo>
+                  <a:lnTo>
+                    <a:pt x="2148675" y="1170487"/>
+                  </a:lnTo>
+                  <a:lnTo>
+                    <a:pt x="2220298" y="1199555"/>
+                  </a:lnTo>
+                  <a:lnTo>
+                    <a:pt x="2291920" y="1228099"/>
+                  </a:lnTo>
+                  <a:lnTo>
+                    <a:pt x="2363543" y="1256129"/>
+                  </a:lnTo>
+                  <a:lnTo>
+                    <a:pt x="2435165" y="1283653"/>
+                  </a:lnTo>
+                  <a:lnTo>
+                    <a:pt x="2506788" y="1310681"/>
+                  </a:lnTo>
+                  <a:lnTo>
+                    <a:pt x="2578410" y="1337221"/>
+                  </a:lnTo>
+                  <a:lnTo>
+                    <a:pt x="2650033" y="1363283"/>
+                  </a:lnTo>
+                  <a:lnTo>
+                    <a:pt x="2721655" y="1388876"/>
+                  </a:lnTo>
+                  <a:lnTo>
+                    <a:pt x="2793278" y="1414007"/>
+                  </a:lnTo>
+                  <a:lnTo>
+                    <a:pt x="2864901" y="1438685"/>
+                  </a:lnTo>
+                  <a:lnTo>
+                    <a:pt x="2936523" y="1462918"/>
+                  </a:lnTo>
+                  <a:lnTo>
+                    <a:pt x="3008146" y="1486714"/>
+                  </a:lnTo>
+                  <a:lnTo>
+                    <a:pt x="3079768" y="1510081"/>
+                  </a:lnTo>
+                  <a:lnTo>
+                    <a:pt x="3151391" y="1533027"/>
+                  </a:lnTo>
+                  <a:lnTo>
+                    <a:pt x="3223013" y="1555559"/>
+                  </a:lnTo>
+                  <a:lnTo>
+                    <a:pt x="3294636" y="1577686"/>
+                  </a:lnTo>
+                  <a:lnTo>
+                    <a:pt x="3366258" y="1599413"/>
+                  </a:lnTo>
+                  <a:lnTo>
+                    <a:pt x="3437881" y="1620748"/>
+                  </a:lnTo>
+                  <a:lnTo>
+                    <a:pt x="3509503" y="1641699"/>
+                  </a:lnTo>
+                  <a:lnTo>
+                    <a:pt x="3581126" y="1662272"/>
+                  </a:lnTo>
+                  <a:lnTo>
+                    <a:pt x="3652748" y="1682475"/>
+                  </a:lnTo>
+                  <a:lnTo>
+                    <a:pt x="3724371" y="1702313"/>
+                  </a:lnTo>
+                  <a:lnTo>
+                    <a:pt x="3795993" y="1721793"/>
+                  </a:lnTo>
+                  <a:lnTo>
+                    <a:pt x="3867616" y="1740923"/>
+                  </a:lnTo>
+                  <a:lnTo>
+                    <a:pt x="3939238" y="1759707"/>
+                  </a:lnTo>
+                  <a:lnTo>
+                    <a:pt x="4010861" y="1778153"/>
+                  </a:lnTo>
+                  <a:lnTo>
+                    <a:pt x="4082483" y="1796266"/>
+                  </a:lnTo>
+                  <a:lnTo>
+                    <a:pt x="4154106" y="1814053"/>
+                  </a:lnTo>
+                  <a:lnTo>
+                    <a:pt x="4225729" y="1831519"/>
+                  </a:lnTo>
+                  <a:lnTo>
+                    <a:pt x="4297351" y="1848670"/>
+                  </a:lnTo>
+                  <a:lnTo>
+                    <a:pt x="4368974" y="1865513"/>
+                  </a:lnTo>
+                  <a:lnTo>
+                    <a:pt x="4440596" y="1882051"/>
+                  </a:lnTo>
+                  <a:lnTo>
+                    <a:pt x="4512219" y="1898291"/>
+                  </a:lnTo>
+                  <a:lnTo>
+                    <a:pt x="4583841" y="1914239"/>
+                  </a:lnTo>
+                  <a:lnTo>
+                    <a:pt x="4655464" y="1929899"/>
+                  </a:lnTo>
+                  <a:lnTo>
+                    <a:pt x="4727086" y="1945276"/>
+                  </a:lnTo>
+                  <a:lnTo>
+                    <a:pt x="4798709" y="1955191"/>
+                  </a:lnTo>
+                  <a:lnTo>
+                    <a:pt x="4870331" y="1958954"/>
+                  </a:lnTo>
+                  <a:lnTo>
+                    <a:pt x="4941954" y="1962700"/>
+                  </a:lnTo>
+                  <a:lnTo>
+                    <a:pt x="5013576" y="1966429"/>
+                  </a:lnTo>
+                  <a:lnTo>
+                    <a:pt x="5085199" y="1970141"/>
+                  </a:lnTo>
+                  <a:lnTo>
+                    <a:pt x="5156821" y="1973836"/>
+                  </a:lnTo>
+                  <a:lnTo>
+                    <a:pt x="5228444" y="1977514"/>
+                  </a:lnTo>
+                  <a:lnTo>
+                    <a:pt x="5300066" y="1981175"/>
+                  </a:lnTo>
+                  <a:lnTo>
+                    <a:pt x="5371689" y="1984820"/>
+                  </a:lnTo>
+                  <a:lnTo>
+                    <a:pt x="5443311" y="1988449"/>
+                  </a:lnTo>
+                  <a:lnTo>
+                    <a:pt x="5514934" y="1992061"/>
+                  </a:lnTo>
+                  <a:lnTo>
+                    <a:pt x="5586557" y="1995656"/>
+                  </a:lnTo>
+                  <a:lnTo>
+                    <a:pt x="5658179" y="1999235"/>
+                  </a:lnTo>
+                  <a:lnTo>
+                    <a:pt x="5729802" y="2002798"/>
+                  </a:lnTo>
+                  <a:lnTo>
+                    <a:pt x="5801424" y="2006344"/>
+                  </a:lnTo>
+                  <a:lnTo>
+                    <a:pt x="5873047" y="2009875"/>
+                  </a:lnTo>
+                  <a:lnTo>
+                    <a:pt x="5944669" y="2013389"/>
+                  </a:lnTo>
+                  <a:lnTo>
+                    <a:pt x="6016292" y="2016888"/>
+                  </a:lnTo>
+                  <a:lnTo>
+                    <a:pt x="6087914" y="2020370"/>
+                  </a:lnTo>
+                  <a:lnTo>
+                    <a:pt x="6159537" y="2023837"/>
+                  </a:lnTo>
+                  <a:lnTo>
+                    <a:pt x="6231159" y="2027288"/>
+                  </a:lnTo>
+                  <a:lnTo>
+                    <a:pt x="6302782" y="2030723"/>
+                  </a:lnTo>
+                  <a:lnTo>
+                    <a:pt x="6374404" y="2034143"/>
+                  </a:lnTo>
+                  <a:lnTo>
+                    <a:pt x="6446027" y="2037547"/>
+                  </a:lnTo>
+                  <a:lnTo>
+                    <a:pt x="6517649" y="2040936"/>
+                  </a:lnTo>
+                  <a:lnTo>
+                    <a:pt x="6589272" y="2044309"/>
+                  </a:lnTo>
+                  <a:lnTo>
+                    <a:pt x="6660894" y="2047667"/>
+                  </a:lnTo>
+                  <a:lnTo>
+                    <a:pt x="6732517" y="2051009"/>
+                  </a:lnTo>
+                  <a:lnTo>
+                    <a:pt x="6804139" y="2054337"/>
+                  </a:lnTo>
+                  <a:lnTo>
+                    <a:pt x="6875762" y="2057649"/>
+                  </a:lnTo>
+                  <a:lnTo>
+                    <a:pt x="6947385" y="2060946"/>
+                  </a:lnTo>
+                  <a:lnTo>
+                    <a:pt x="7019007" y="2064229"/>
+                  </a:lnTo>
+                  <a:lnTo>
+                    <a:pt x="7090630" y="2067496"/>
+                  </a:lnTo>
+                  <a:lnTo>
+                    <a:pt x="7090630" y="2323362"/>
+                  </a:lnTo>
+                  <a:lnTo>
+                    <a:pt x="7019007" y="2314926"/>
+                  </a:lnTo>
+                  <a:lnTo>
+                    <a:pt x="6947385" y="2306334"/>
+                  </a:lnTo>
+                  <a:lnTo>
+                    <a:pt x="6875762" y="2297585"/>
+                  </a:lnTo>
+                  <a:lnTo>
+                    <a:pt x="6804139" y="2288675"/>
+                  </a:lnTo>
+                  <a:lnTo>
+                    <a:pt x="6732517" y="2279602"/>
+                  </a:lnTo>
+                  <a:lnTo>
+                    <a:pt x="6660894" y="2270362"/>
+                  </a:lnTo>
+                  <a:lnTo>
+                    <a:pt x="6589272" y="2260952"/>
+                  </a:lnTo>
+                  <a:lnTo>
+                    <a:pt x="6517649" y="2251370"/>
+                  </a:lnTo>
+                  <a:lnTo>
+                    <a:pt x="6446027" y="2241611"/>
+                  </a:lnTo>
+                  <a:lnTo>
+                    <a:pt x="6374404" y="2231674"/>
+                  </a:lnTo>
+                  <a:lnTo>
+                    <a:pt x="6302782" y="2221554"/>
+                  </a:lnTo>
+                  <a:lnTo>
+                    <a:pt x="6231159" y="2211248"/>
+                  </a:lnTo>
+                  <a:lnTo>
+                    <a:pt x="6159537" y="2200753"/>
+                  </a:lnTo>
+                  <a:lnTo>
+                    <a:pt x="6087914" y="2190066"/>
+                  </a:lnTo>
+                  <a:lnTo>
+                    <a:pt x="6016292" y="2179182"/>
+                  </a:lnTo>
+                  <a:lnTo>
+                    <a:pt x="5944669" y="2168098"/>
+                  </a:lnTo>
+                  <a:lnTo>
+                    <a:pt x="5873047" y="2156811"/>
+                  </a:lnTo>
+                  <a:lnTo>
+                    <a:pt x="5801424" y="2145317"/>
+                  </a:lnTo>
+                  <a:lnTo>
+                    <a:pt x="5729802" y="2133612"/>
+                  </a:lnTo>
+                  <a:lnTo>
+                    <a:pt x="5658179" y="2121692"/>
+                  </a:lnTo>
+                  <a:lnTo>
+                    <a:pt x="5586557" y="2109553"/>
+                  </a:lnTo>
+                  <a:lnTo>
+                    <a:pt x="5514934" y="2097191"/>
+                  </a:lnTo>
+                  <a:lnTo>
+                    <a:pt x="5443311" y="2084602"/>
+                  </a:lnTo>
+                  <a:lnTo>
+                    <a:pt x="5371689" y="2071782"/>
+                  </a:lnTo>
+                  <a:lnTo>
+                    <a:pt x="5300066" y="2058727"/>
+                  </a:lnTo>
+                  <a:lnTo>
+                    <a:pt x="5228444" y="2045432"/>
+                  </a:lnTo>
+                  <a:lnTo>
+                    <a:pt x="5156821" y="2031893"/>
+                  </a:lnTo>
+                  <a:lnTo>
+                    <a:pt x="5085199" y="2018105"/>
+                  </a:lnTo>
+                  <a:lnTo>
+                    <a:pt x="5013576" y="2004065"/>
+                  </a:lnTo>
+                  <a:lnTo>
+                    <a:pt x="4941954" y="1989766"/>
+                  </a:lnTo>
+                  <a:lnTo>
+                    <a:pt x="4870331" y="1975205"/>
+                  </a:lnTo>
+                  <a:lnTo>
+                    <a:pt x="4798709" y="1960377"/>
+                  </a:lnTo>
+                  <a:lnTo>
+                    <a:pt x="4727086" y="1951410"/>
+                  </a:lnTo>
+                  <a:lnTo>
+                    <a:pt x="4655464" y="1947613"/>
+                  </a:lnTo>
+                  <a:lnTo>
+                    <a:pt x="4583841" y="1943798"/>
+                  </a:lnTo>
+                  <a:lnTo>
+                    <a:pt x="4512219" y="1939966"/>
+                  </a:lnTo>
+                  <a:lnTo>
+                    <a:pt x="4440596" y="1936116"/>
+                  </a:lnTo>
+                  <a:lnTo>
+                    <a:pt x="4368974" y="1932249"/>
+                  </a:lnTo>
+                  <a:lnTo>
+                    <a:pt x="4297351" y="1928364"/>
+                  </a:lnTo>
+                  <a:lnTo>
+                    <a:pt x="4225729" y="1924461"/>
+                  </a:lnTo>
+                  <a:lnTo>
+                    <a:pt x="4154106" y="1920540"/>
+                  </a:lnTo>
+                  <a:lnTo>
+                    <a:pt x="4082483" y="1916602"/>
+                  </a:lnTo>
+                  <a:lnTo>
+                    <a:pt x="4010861" y="1912646"/>
+                  </a:lnTo>
+                  <a:lnTo>
+                    <a:pt x="3939238" y="1908671"/>
+                  </a:lnTo>
+                  <a:lnTo>
+                    <a:pt x="3867616" y="1904678"/>
+                  </a:lnTo>
+                  <a:lnTo>
+                    <a:pt x="3795993" y="1900667"/>
+                  </a:lnTo>
+                  <a:lnTo>
+                    <a:pt x="3724371" y="1896638"/>
+                  </a:lnTo>
+                  <a:lnTo>
+                    <a:pt x="3652748" y="1892591"/>
+                  </a:lnTo>
+                  <a:lnTo>
+                    <a:pt x="3581126" y="1888524"/>
+                  </a:lnTo>
+                  <a:lnTo>
+                    <a:pt x="3509503" y="1884440"/>
+                  </a:lnTo>
+                  <a:lnTo>
+                    <a:pt x="3437881" y="1880336"/>
+                  </a:lnTo>
+                  <a:lnTo>
+                    <a:pt x="3366258" y="1876214"/>
+                  </a:lnTo>
+                  <a:lnTo>
+                    <a:pt x="3294636" y="1872073"/>
+                  </a:lnTo>
+                  <a:lnTo>
+                    <a:pt x="3223013" y="1867914"/>
+                  </a:lnTo>
+                  <a:lnTo>
+                    <a:pt x="3151391" y="1863735"/>
+                  </a:lnTo>
+                  <a:lnTo>
+                    <a:pt x="3079768" y="1859537"/>
+                  </a:lnTo>
+                  <a:lnTo>
+                    <a:pt x="3008146" y="1855320"/>
+                  </a:lnTo>
+                  <a:lnTo>
+                    <a:pt x="2936523" y="1851083"/>
+                  </a:lnTo>
+                  <a:lnTo>
+                    <a:pt x="2864901" y="1846828"/>
+                  </a:lnTo>
+                  <a:lnTo>
+                    <a:pt x="2793278" y="1842553"/>
+                  </a:lnTo>
+                  <a:lnTo>
+                    <a:pt x="2721655" y="1838258"/>
+                  </a:lnTo>
+                  <a:lnTo>
+                    <a:pt x="2650033" y="1833944"/>
+                  </a:lnTo>
+                  <a:lnTo>
+                    <a:pt x="2578410" y="1829610"/>
+                  </a:lnTo>
+                  <a:lnTo>
+                    <a:pt x="2506788" y="1825256"/>
+                  </a:lnTo>
+                  <a:lnTo>
+                    <a:pt x="2435165" y="1820882"/>
+                  </a:lnTo>
+                  <a:lnTo>
+                    <a:pt x="2363543" y="1816489"/>
+                  </a:lnTo>
+                  <a:lnTo>
+                    <a:pt x="2291920" y="1812075"/>
+                  </a:lnTo>
+                  <a:lnTo>
+                    <a:pt x="2220298" y="1807641"/>
+                  </a:lnTo>
+                  <a:lnTo>
+                    <a:pt x="2148675" y="1803187"/>
+                  </a:lnTo>
+                  <a:lnTo>
+                    <a:pt x="2077053" y="1798713"/>
+                  </a:lnTo>
+                  <a:lnTo>
+                    <a:pt x="2005430" y="1794218"/>
+                  </a:lnTo>
+                  <a:lnTo>
+                    <a:pt x="1933808" y="1789702"/>
+                  </a:lnTo>
+                  <a:lnTo>
+                    <a:pt x="1862185" y="1785166"/>
+                  </a:lnTo>
+                  <a:lnTo>
+                    <a:pt x="1790563" y="1780610"/>
+                  </a:lnTo>
+                  <a:lnTo>
+                    <a:pt x="1718940" y="1776032"/>
+                  </a:lnTo>
+                  <a:lnTo>
+                    <a:pt x="1647318" y="1771434"/>
+                  </a:lnTo>
+                  <a:lnTo>
+                    <a:pt x="1575695" y="1766814"/>
+                  </a:lnTo>
+                  <a:lnTo>
+                    <a:pt x="1504073" y="1762174"/>
+                  </a:lnTo>
+                  <a:lnTo>
+                    <a:pt x="1432450" y="1757512"/>
+                  </a:lnTo>
+                  <a:lnTo>
+                    <a:pt x="1360827" y="1752829"/>
+                  </a:lnTo>
+                  <a:lnTo>
+                    <a:pt x="1289205" y="1748124"/>
+                  </a:lnTo>
+                  <a:lnTo>
+                    <a:pt x="1217582" y="1743399"/>
+                  </a:lnTo>
+                  <a:lnTo>
+                    <a:pt x="1145960" y="1738651"/>
+                  </a:lnTo>
+                  <a:lnTo>
+                    <a:pt x="1074337" y="1733882"/>
+                  </a:lnTo>
+                  <a:lnTo>
+                    <a:pt x="1002715" y="1729091"/>
+                  </a:lnTo>
+                  <a:lnTo>
+                    <a:pt x="931092" y="1724278"/>
+                  </a:lnTo>
+                  <a:lnTo>
+                    <a:pt x="859470" y="1719443"/>
+                  </a:lnTo>
+                  <a:lnTo>
+                    <a:pt x="787847" y="1714586"/>
+                  </a:lnTo>
+                  <a:lnTo>
+                    <a:pt x="716225" y="1709707"/>
+                  </a:lnTo>
+                  <a:lnTo>
+                    <a:pt x="644602" y="1704806"/>
+                  </a:lnTo>
+                  <a:lnTo>
+                    <a:pt x="572980" y="1699882"/>
+                  </a:lnTo>
+                  <a:lnTo>
+                    <a:pt x="501357" y="1694936"/>
+                  </a:lnTo>
+                  <a:lnTo>
+                    <a:pt x="429735" y="1689967"/>
+                  </a:lnTo>
+                  <a:lnTo>
+                    <a:pt x="358112" y="1684976"/>
+                  </a:lnTo>
+                  <a:lnTo>
+                    <a:pt x="286490" y="1679961"/>
+                  </a:lnTo>
+                  <a:lnTo>
+                    <a:pt x="214867" y="1674924"/>
+                  </a:lnTo>
+                  <a:lnTo>
+                    <a:pt x="143245" y="1669864"/>
+                  </a:lnTo>
+                  <a:lnTo>
+                    <a:pt x="71622" y="1664781"/>
+                  </a:lnTo>
+                  <a:lnTo>
+                    <a:pt x="0" y="1659674"/>
                   </a:lnTo>
                   <a:close/>
                 </a:path>
@@ -3676,312 +3676,312 @@
           </p:nvSpPr>
           <p:spPr>
             <a:xfrm>
-              <a:off x="1172049" y="2794997"/>
-              <a:ext cx="7090630" cy="2043978"/>
+              <a:off x="1172049" y="2774335"/>
+              <a:ext cx="7090630" cy="2067496"/>
             </a:xfrm>
             <a:custGeom>
               <a:avLst/>
               <a:pathLst>
-                <a:path w="7090630" h="2043978">
+                <a:path w="7090630" h="2067496">
                   <a:moveTo>
                     <a:pt x="0" y="0"/>
                   </a:moveTo>
                   <a:lnTo>
-                    <a:pt x="71622" y="49492"/>
-                  </a:lnTo>
-                  <a:lnTo>
-                    <a:pt x="143245" y="98098"/>
-                  </a:lnTo>
-                  <a:lnTo>
-                    <a:pt x="214867" y="145833"/>
-                  </a:lnTo>
-                  <a:lnTo>
-                    <a:pt x="286490" y="192713"/>
-                  </a:lnTo>
-                  <a:lnTo>
-                    <a:pt x="358112" y="238752"/>
-                  </a:lnTo>
-                  <a:lnTo>
-                    <a:pt x="429735" y="283967"/>
-                  </a:lnTo>
-                  <a:lnTo>
-                    <a:pt x="501357" y="328372"/>
-                  </a:lnTo>
-                  <a:lnTo>
-                    <a:pt x="572980" y="371981"/>
-                  </a:lnTo>
-                  <a:lnTo>
-                    <a:pt x="644602" y="414808"/>
-                  </a:lnTo>
-                  <a:lnTo>
-                    <a:pt x="716225" y="456869"/>
-                  </a:lnTo>
-                  <a:lnTo>
-                    <a:pt x="787847" y="498175"/>
-                  </a:lnTo>
-                  <a:lnTo>
-                    <a:pt x="859470" y="538742"/>
-                  </a:lnTo>
-                  <a:lnTo>
-                    <a:pt x="931092" y="578582"/>
-                  </a:lnTo>
-                  <a:lnTo>
-                    <a:pt x="1002715" y="617708"/>
-                  </a:lnTo>
-                  <a:lnTo>
-                    <a:pt x="1074337" y="656132"/>
-                  </a:lnTo>
-                  <a:lnTo>
-                    <a:pt x="1145960" y="693869"/>
-                  </a:lnTo>
-                  <a:lnTo>
-                    <a:pt x="1217582" y="730929"/>
-                  </a:lnTo>
-                  <a:lnTo>
-                    <a:pt x="1289205" y="767325"/>
-                  </a:lnTo>
-                  <a:lnTo>
-                    <a:pt x="1360827" y="803069"/>
-                  </a:lnTo>
-                  <a:lnTo>
-                    <a:pt x="1432450" y="838173"/>
-                  </a:lnTo>
-                  <a:lnTo>
-                    <a:pt x="1504073" y="872648"/>
-                  </a:lnTo>
-                  <a:lnTo>
-                    <a:pt x="1575695" y="906505"/>
-                  </a:lnTo>
-                  <a:lnTo>
-                    <a:pt x="1647318" y="939755"/>
-                  </a:lnTo>
-                  <a:lnTo>
-                    <a:pt x="1718940" y="972409"/>
-                  </a:lnTo>
-                  <a:lnTo>
-                    <a:pt x="1790563" y="1004479"/>
-                  </a:lnTo>
-                  <a:lnTo>
-                    <a:pt x="1862185" y="1035974"/>
-                  </a:lnTo>
-                  <a:lnTo>
-                    <a:pt x="1933808" y="1066904"/>
-                  </a:lnTo>
-                  <a:lnTo>
-                    <a:pt x="2005430" y="1097281"/>
-                  </a:lnTo>
-                  <a:lnTo>
-                    <a:pt x="2077053" y="1127113"/>
-                  </a:lnTo>
-                  <a:lnTo>
-                    <a:pt x="2148675" y="1156410"/>
-                  </a:lnTo>
-                  <a:lnTo>
-                    <a:pt x="2220298" y="1185183"/>
-                  </a:lnTo>
-                  <a:lnTo>
-                    <a:pt x="2291920" y="1213440"/>
-                  </a:lnTo>
-                  <a:lnTo>
-                    <a:pt x="2363543" y="1241191"/>
-                  </a:lnTo>
-                  <a:lnTo>
-                    <a:pt x="2435165" y="1268445"/>
-                  </a:lnTo>
-                  <a:lnTo>
-                    <a:pt x="2506788" y="1295210"/>
-                  </a:lnTo>
-                  <a:lnTo>
-                    <a:pt x="2578410" y="1321496"/>
-                  </a:lnTo>
-                  <a:lnTo>
-                    <a:pt x="2650033" y="1347310"/>
-                  </a:lnTo>
-                  <a:lnTo>
-                    <a:pt x="2721655" y="1372663"/>
-                  </a:lnTo>
-                  <a:lnTo>
-                    <a:pt x="2793278" y="1397561"/>
-                  </a:lnTo>
-                  <a:lnTo>
-                    <a:pt x="2864901" y="1422012"/>
-                  </a:lnTo>
-                  <a:lnTo>
-                    <a:pt x="2936523" y="1446026"/>
-                  </a:lnTo>
-                  <a:lnTo>
-                    <a:pt x="3008146" y="1469610"/>
-                  </a:lnTo>
-                  <a:lnTo>
-                    <a:pt x="3079768" y="1492770"/>
-                  </a:lnTo>
-                  <a:lnTo>
-                    <a:pt x="3151391" y="1515516"/>
-                  </a:lnTo>
-                  <a:lnTo>
-                    <a:pt x="3223013" y="1537855"/>
-                  </a:lnTo>
-                  <a:lnTo>
-                    <a:pt x="3294636" y="1559793"/>
-                  </a:lnTo>
-                  <a:lnTo>
-                    <a:pt x="3366258" y="1581338"/>
-                  </a:lnTo>
-                  <a:lnTo>
-                    <a:pt x="3437881" y="1602497"/>
-                  </a:lnTo>
-                  <a:lnTo>
-                    <a:pt x="3509503" y="1623277"/>
-                  </a:lnTo>
-                  <a:lnTo>
-                    <a:pt x="3581126" y="1643684"/>
-                  </a:lnTo>
-                  <a:lnTo>
-                    <a:pt x="3652748" y="1663726"/>
-                  </a:lnTo>
-                  <a:lnTo>
-                    <a:pt x="3724371" y="1683409"/>
-                  </a:lnTo>
-                  <a:lnTo>
-                    <a:pt x="3795993" y="1702739"/>
-                  </a:lnTo>
-                  <a:lnTo>
-                    <a:pt x="3867616" y="1721723"/>
-                  </a:lnTo>
-                  <a:lnTo>
-                    <a:pt x="3939238" y="1740367"/>
-                  </a:lnTo>
-                  <a:lnTo>
-                    <a:pt x="4010861" y="1758676"/>
-                  </a:lnTo>
-                  <a:lnTo>
-                    <a:pt x="4082483" y="1776658"/>
-                  </a:lnTo>
-                  <a:lnTo>
-                    <a:pt x="4154106" y="1794317"/>
-                  </a:lnTo>
-                  <a:lnTo>
-                    <a:pt x="4225729" y="1811660"/>
-                  </a:lnTo>
-                  <a:lnTo>
-                    <a:pt x="4297351" y="1828692"/>
-                  </a:lnTo>
-                  <a:lnTo>
-                    <a:pt x="4368974" y="1845420"/>
-                  </a:lnTo>
-                  <a:lnTo>
-                    <a:pt x="4440596" y="1861847"/>
-                  </a:lnTo>
-                  <a:lnTo>
-                    <a:pt x="4512219" y="1877980"/>
-                  </a:lnTo>
-                  <a:lnTo>
-                    <a:pt x="4583841" y="1893824"/>
-                  </a:lnTo>
-                  <a:lnTo>
-                    <a:pt x="4655464" y="1909384"/>
-                  </a:lnTo>
-                  <a:lnTo>
-                    <a:pt x="4727086" y="1924665"/>
-                  </a:lnTo>
-                  <a:lnTo>
-                    <a:pt x="4798709" y="1934482"/>
-                  </a:lnTo>
-                  <a:lnTo>
-                    <a:pt x="4870331" y="1938144"/>
-                  </a:lnTo>
-                  <a:lnTo>
-                    <a:pt x="4941954" y="1941790"/>
-                  </a:lnTo>
-                  <a:lnTo>
-                    <a:pt x="5013576" y="1945420"/>
-                  </a:lnTo>
-                  <a:lnTo>
-                    <a:pt x="5085199" y="1949033"/>
-                  </a:lnTo>
-                  <a:lnTo>
-                    <a:pt x="5156821" y="1952631"/>
-                  </a:lnTo>
-                  <a:lnTo>
-                    <a:pt x="5228444" y="1956213"/>
-                  </a:lnTo>
-                  <a:lnTo>
-                    <a:pt x="5300066" y="1959779"/>
-                  </a:lnTo>
-                  <a:lnTo>
-                    <a:pt x="5371689" y="1963329"/>
-                  </a:lnTo>
-                  <a:lnTo>
-                    <a:pt x="5443311" y="1966864"/>
-                  </a:lnTo>
-                  <a:lnTo>
-                    <a:pt x="5514934" y="1970382"/>
-                  </a:lnTo>
-                  <a:lnTo>
-                    <a:pt x="5586557" y="1973886"/>
-                  </a:lnTo>
-                  <a:lnTo>
-                    <a:pt x="5658179" y="1977373"/>
-                  </a:lnTo>
-                  <a:lnTo>
-                    <a:pt x="5729802" y="1980846"/>
-                  </a:lnTo>
-                  <a:lnTo>
-                    <a:pt x="5801424" y="1984303"/>
-                  </a:lnTo>
-                  <a:lnTo>
-                    <a:pt x="5873047" y="1987744"/>
-                  </a:lnTo>
-                  <a:lnTo>
-                    <a:pt x="5944669" y="1991171"/>
-                  </a:lnTo>
-                  <a:lnTo>
-                    <a:pt x="6016292" y="1994582"/>
-                  </a:lnTo>
-                  <a:lnTo>
-                    <a:pt x="6087914" y="1997978"/>
-                  </a:lnTo>
-                  <a:lnTo>
-                    <a:pt x="6159537" y="2001360"/>
-                  </a:lnTo>
-                  <a:lnTo>
-                    <a:pt x="6231159" y="2004726"/>
-                  </a:lnTo>
-                  <a:lnTo>
-                    <a:pt x="6302782" y="2008077"/>
-                  </a:lnTo>
-                  <a:lnTo>
-                    <a:pt x="6374404" y="2011414"/>
-                  </a:lnTo>
-                  <a:lnTo>
-                    <a:pt x="6446027" y="2014735"/>
-                  </a:lnTo>
-                  <a:lnTo>
-                    <a:pt x="6517649" y="2018042"/>
-                  </a:lnTo>
-                  <a:lnTo>
-                    <a:pt x="6589272" y="2021335"/>
-                  </a:lnTo>
-                  <a:lnTo>
-                    <a:pt x="6660894" y="2024613"/>
-                  </a:lnTo>
-                  <a:lnTo>
-                    <a:pt x="6732517" y="2027876"/>
-                  </a:lnTo>
-                  <a:lnTo>
-                    <a:pt x="6804139" y="2031125"/>
-                  </a:lnTo>
-                  <a:lnTo>
-                    <a:pt x="6875762" y="2034360"/>
-                  </a:lnTo>
-                  <a:lnTo>
-                    <a:pt x="6947385" y="2037580"/>
-                  </a:lnTo>
-                  <a:lnTo>
-                    <a:pt x="7019007" y="2040786"/>
-                  </a:lnTo>
-                  <a:lnTo>
-                    <a:pt x="7090630" y="2043978"/>
+                    <a:pt x="71622" y="50168"/>
+                  </a:lnTo>
+                  <a:lnTo>
+                    <a:pt x="143245" y="99433"/>
+                  </a:lnTo>
+                  <a:lnTo>
+                    <a:pt x="214867" y="147809"/>
+                  </a:lnTo>
+                  <a:lnTo>
+                    <a:pt x="286490" y="195314"/>
+                  </a:lnTo>
+                  <a:lnTo>
+                    <a:pt x="358112" y="241961"/>
+                  </a:lnTo>
+                  <a:lnTo>
+                    <a:pt x="429735" y="287768"/>
+                  </a:lnTo>
+                  <a:lnTo>
+                    <a:pt x="501357" y="332750"/>
+                  </a:lnTo>
+                  <a:lnTo>
+                    <a:pt x="572980" y="376920"/>
+                  </a:lnTo>
+                  <a:lnTo>
+                    <a:pt x="644602" y="420294"/>
+                  </a:lnTo>
+                  <a:lnTo>
+                    <a:pt x="716225" y="462886"/>
+                  </a:lnTo>
+                  <a:lnTo>
+                    <a:pt x="787847" y="504710"/>
+                  </a:lnTo>
+                  <a:lnTo>
+                    <a:pt x="859470" y="545780"/>
+                  </a:lnTo>
+                  <a:lnTo>
+                    <a:pt x="931092" y="586110"/>
+                  </a:lnTo>
+                  <a:lnTo>
+                    <a:pt x="1002715" y="625713"/>
+                  </a:lnTo>
+                  <a:lnTo>
+                    <a:pt x="1074337" y="664602"/>
+                  </a:lnTo>
+                  <a:lnTo>
+                    <a:pt x="1145960" y="702790"/>
+                  </a:lnTo>
+                  <a:lnTo>
+                    <a:pt x="1217582" y="740289"/>
+                  </a:lnTo>
+                  <a:lnTo>
+                    <a:pt x="1289205" y="777113"/>
+                  </a:lnTo>
+                  <a:lnTo>
+                    <a:pt x="1360827" y="813272"/>
+                  </a:lnTo>
+                  <a:lnTo>
+                    <a:pt x="1432450" y="848780"/>
+                  </a:lnTo>
+                  <a:lnTo>
+                    <a:pt x="1504073" y="883647"/>
+                  </a:lnTo>
+                  <a:lnTo>
+                    <a:pt x="1575695" y="917886"/>
+                  </a:lnTo>
+                  <a:lnTo>
+                    <a:pt x="1647318" y="951508"/>
+                  </a:lnTo>
+                  <a:lnTo>
+                    <a:pt x="1718940" y="984524"/>
+                  </a:lnTo>
+                  <a:lnTo>
+                    <a:pt x="1790563" y="1016944"/>
+                  </a:lnTo>
+                  <a:lnTo>
+                    <a:pt x="1862185" y="1048780"/>
+                  </a:lnTo>
+                  <a:lnTo>
+                    <a:pt x="1933808" y="1080042"/>
+                  </a:lnTo>
+                  <a:lnTo>
+                    <a:pt x="2005430" y="1110741"/>
+                  </a:lnTo>
+                  <a:lnTo>
+                    <a:pt x="2077053" y="1140886"/>
+                  </a:lnTo>
+                  <a:lnTo>
+                    <a:pt x="2148675" y="1170487"/>
+                  </a:lnTo>
+                  <a:lnTo>
+                    <a:pt x="2220298" y="1199555"/>
+                  </a:lnTo>
+                  <a:lnTo>
+                    <a:pt x="2291920" y="1228099"/>
+                  </a:lnTo>
+                  <a:lnTo>
+                    <a:pt x="2363543" y="1256129"/>
+                  </a:lnTo>
+                  <a:lnTo>
+                    <a:pt x="2435165" y="1283653"/>
+                  </a:lnTo>
+                  <a:lnTo>
+                    <a:pt x="2506788" y="1310681"/>
+                  </a:lnTo>
+                  <a:lnTo>
+                    <a:pt x="2578410" y="1337221"/>
+                  </a:lnTo>
+                  <a:lnTo>
+                    <a:pt x="2650033" y="1363283"/>
+                  </a:lnTo>
+                  <a:lnTo>
+                    <a:pt x="2721655" y="1388876"/>
+                  </a:lnTo>
+                  <a:lnTo>
+                    <a:pt x="2793278" y="1414007"/>
+                  </a:lnTo>
+                  <a:lnTo>
+                    <a:pt x="2864901" y="1438685"/>
+                  </a:lnTo>
+                  <a:lnTo>
+                    <a:pt x="2936523" y="1462918"/>
+                  </a:lnTo>
+                  <a:lnTo>
+                    <a:pt x="3008146" y="1486714"/>
+                  </a:lnTo>
+                  <a:lnTo>
+                    <a:pt x="3079768" y="1510081"/>
+                  </a:lnTo>
+                  <a:lnTo>
+                    <a:pt x="3151391" y="1533027"/>
+                  </a:lnTo>
+                  <a:lnTo>
+                    <a:pt x="3223013" y="1555559"/>
+                  </a:lnTo>
+                  <a:lnTo>
+                    <a:pt x="3294636" y="1577686"/>
+                  </a:lnTo>
+                  <a:lnTo>
+                    <a:pt x="3366258" y="1599413"/>
+                  </a:lnTo>
+                  <a:lnTo>
+                    <a:pt x="3437881" y="1620748"/>
+                  </a:lnTo>
+                  <a:lnTo>
+                    <a:pt x="3509503" y="1641699"/>
+                  </a:lnTo>
+                  <a:lnTo>
+                    <a:pt x="3581126" y="1662272"/>
+                  </a:lnTo>
+                  <a:lnTo>
+                    <a:pt x="3652748" y="1682475"/>
+                  </a:lnTo>
+                  <a:lnTo>
+                    <a:pt x="3724371" y="1702313"/>
+                  </a:lnTo>
+                  <a:lnTo>
+                    <a:pt x="3795993" y="1721793"/>
+                  </a:lnTo>
+                  <a:lnTo>
+                    <a:pt x="3867616" y="1740923"/>
+                  </a:lnTo>
+                  <a:lnTo>
+                    <a:pt x="3939238" y="1759707"/>
+                  </a:lnTo>
+                  <a:lnTo>
+                    <a:pt x="4010861" y="1778153"/>
+                  </a:lnTo>
+                  <a:lnTo>
+                    <a:pt x="4082483" y="1796266"/>
+                  </a:lnTo>
+                  <a:lnTo>
+                    <a:pt x="4154106" y="1814053"/>
+                  </a:lnTo>
+                  <a:lnTo>
+                    <a:pt x="4225729" y="1831519"/>
+                  </a:lnTo>
+                  <a:lnTo>
+                    <a:pt x="4297351" y="1848670"/>
+                  </a:lnTo>
+                  <a:lnTo>
+                    <a:pt x="4368974" y="1865513"/>
+                  </a:lnTo>
+                  <a:lnTo>
+                    <a:pt x="4440596" y="1882051"/>
+                  </a:lnTo>
+                  <a:lnTo>
+                    <a:pt x="4512219" y="1898291"/>
+                  </a:lnTo>
+                  <a:lnTo>
+                    <a:pt x="4583841" y="1914239"/>
+                  </a:lnTo>
+                  <a:lnTo>
+                    <a:pt x="4655464" y="1929899"/>
+                  </a:lnTo>
+                  <a:lnTo>
+                    <a:pt x="4727086" y="1945276"/>
+                  </a:lnTo>
+                  <a:lnTo>
+                    <a:pt x="4798709" y="1955191"/>
+                  </a:lnTo>
+                  <a:lnTo>
+                    <a:pt x="4870331" y="1958954"/>
+                  </a:lnTo>
+                  <a:lnTo>
+                    <a:pt x="4941954" y="1962700"/>
+                  </a:lnTo>
+                  <a:lnTo>
+                    <a:pt x="5013576" y="1966429"/>
+                  </a:lnTo>
+                  <a:lnTo>
+                    <a:pt x="5085199" y="1970141"/>
+                  </a:lnTo>
+                  <a:lnTo>
+                    <a:pt x="5156821" y="1973836"/>
+                  </a:lnTo>
+                  <a:lnTo>
+                    <a:pt x="5228444" y="1977514"/>
+                  </a:lnTo>
+                  <a:lnTo>
+                    <a:pt x="5300066" y="1981175"/>
+                  </a:lnTo>
+                  <a:lnTo>
+                    <a:pt x="5371689" y="1984820"/>
+                  </a:lnTo>
+                  <a:lnTo>
+                    <a:pt x="5443311" y="1988449"/>
+                  </a:lnTo>
+                  <a:lnTo>
+                    <a:pt x="5514934" y="1992061"/>
+                  </a:lnTo>
+                  <a:lnTo>
+                    <a:pt x="5586557" y="1995656"/>
+                  </a:lnTo>
+                  <a:lnTo>
+                    <a:pt x="5658179" y="1999235"/>
+                  </a:lnTo>
+                  <a:lnTo>
+                    <a:pt x="5729802" y="2002798"/>
+                  </a:lnTo>
+                  <a:lnTo>
+                    <a:pt x="5801424" y="2006344"/>
+                  </a:lnTo>
+                  <a:lnTo>
+                    <a:pt x="5873047" y="2009875"/>
+                  </a:lnTo>
+                  <a:lnTo>
+                    <a:pt x="5944669" y="2013389"/>
+                  </a:lnTo>
+                  <a:lnTo>
+                    <a:pt x="6016292" y="2016888"/>
+                  </a:lnTo>
+                  <a:lnTo>
+                    <a:pt x="6087914" y="2020370"/>
+                  </a:lnTo>
+                  <a:lnTo>
+                    <a:pt x="6159537" y="2023837"/>
+                  </a:lnTo>
+                  <a:lnTo>
+                    <a:pt x="6231159" y="2027288"/>
+                  </a:lnTo>
+                  <a:lnTo>
+                    <a:pt x="6302782" y="2030723"/>
+                  </a:lnTo>
+                  <a:lnTo>
+                    <a:pt x="6374404" y="2034143"/>
+                  </a:lnTo>
+                  <a:lnTo>
+                    <a:pt x="6446027" y="2037547"/>
+                  </a:lnTo>
+                  <a:lnTo>
+                    <a:pt x="6517649" y="2040936"/>
+                  </a:lnTo>
+                  <a:lnTo>
+                    <a:pt x="6589272" y="2044309"/>
+                  </a:lnTo>
+                  <a:lnTo>
+                    <a:pt x="6660894" y="2047667"/>
+                  </a:lnTo>
+                  <a:lnTo>
+                    <a:pt x="6732517" y="2051009"/>
+                  </a:lnTo>
+                  <a:lnTo>
+                    <a:pt x="6804139" y="2054337"/>
+                  </a:lnTo>
+                  <a:lnTo>
+                    <a:pt x="6875762" y="2057649"/>
+                  </a:lnTo>
+                  <a:lnTo>
+                    <a:pt x="6947385" y="2060946"/>
+                  </a:lnTo>
+                  <a:lnTo>
+                    <a:pt x="7019007" y="2064229"/>
+                  </a:lnTo>
+                  <a:lnTo>
+                    <a:pt x="7090630" y="2067496"/>
                   </a:lnTo>
                 </a:path>
               </a:pathLst>
@@ -4001,309 +4001,309 @@
           </p:nvSpPr>
           <p:spPr>
             <a:xfrm>
-              <a:off x="1172049" y="4443147"/>
-              <a:ext cx="7090630" cy="652877"/>
+              <a:off x="1172049" y="4434010"/>
+              <a:ext cx="7090630" cy="663688"/>
             </a:xfrm>
             <a:custGeom>
               <a:avLst/>
               <a:pathLst>
-                <a:path w="7090630" h="652877">
+                <a:path w="7090630" h="663688">
                   <a:moveTo>
-                    <a:pt x="7090630" y="652877"/>
+                    <a:pt x="7090630" y="663688"/>
                   </a:moveTo>
                   <a:lnTo>
-                    <a:pt x="7019007" y="644462"/>
-                  </a:lnTo>
-                  <a:lnTo>
-                    <a:pt x="6947385" y="635894"/>
-                  </a:lnTo>
-                  <a:lnTo>
-                    <a:pt x="6875762" y="627169"/>
-                  </a:lnTo>
-                  <a:lnTo>
-                    <a:pt x="6804139" y="618285"/>
-                  </a:lnTo>
-                  <a:lnTo>
-                    <a:pt x="6732517" y="609240"/>
-                  </a:lnTo>
-                  <a:lnTo>
-                    <a:pt x="6660894" y="600029"/>
-                  </a:lnTo>
-                  <a:lnTo>
-                    <a:pt x="6589272" y="590650"/>
-                  </a:lnTo>
-                  <a:lnTo>
-                    <a:pt x="6517649" y="581100"/>
-                  </a:lnTo>
-                  <a:lnTo>
-                    <a:pt x="6446027" y="571375"/>
-                  </a:lnTo>
-                  <a:lnTo>
-                    <a:pt x="6374404" y="561474"/>
-                  </a:lnTo>
-                  <a:lnTo>
-                    <a:pt x="6302782" y="551391"/>
-                  </a:lnTo>
-                  <a:lnTo>
-                    <a:pt x="6231159" y="541125"/>
-                  </a:lnTo>
-                  <a:lnTo>
-                    <a:pt x="6159537" y="530671"/>
-                  </a:lnTo>
-                  <a:lnTo>
-                    <a:pt x="6087914" y="520027"/>
-                  </a:lnTo>
-                  <a:lnTo>
-                    <a:pt x="6016292" y="509189"/>
-                  </a:lnTo>
-                  <a:lnTo>
-                    <a:pt x="5944669" y="498152"/>
-                  </a:lnTo>
-                  <a:lnTo>
-                    <a:pt x="5873047" y="486915"/>
-                  </a:lnTo>
-                  <a:lnTo>
-                    <a:pt x="5801424" y="475472"/>
-                  </a:lnTo>
-                  <a:lnTo>
-                    <a:pt x="5729802" y="463821"/>
-                  </a:lnTo>
-                  <a:lnTo>
-                    <a:pt x="5658179" y="451957"/>
-                  </a:lnTo>
-                  <a:lnTo>
-                    <a:pt x="5586557" y="439876"/>
-                  </a:lnTo>
-                  <a:lnTo>
-                    <a:pt x="5514934" y="427575"/>
-                  </a:lnTo>
-                  <a:lnTo>
-                    <a:pt x="5443311" y="415050"/>
-                  </a:lnTo>
-                  <a:lnTo>
-                    <a:pt x="5371689" y="402296"/>
-                  </a:lnTo>
-                  <a:lnTo>
-                    <a:pt x="5300066" y="389310"/>
-                  </a:lnTo>
-                  <a:lnTo>
-                    <a:pt x="5228444" y="376086"/>
-                  </a:lnTo>
-                  <a:lnTo>
-                    <a:pt x="5156821" y="362622"/>
-                  </a:lnTo>
-                  <a:lnTo>
-                    <a:pt x="5085199" y="348911"/>
-                  </a:lnTo>
-                  <a:lnTo>
-                    <a:pt x="5013576" y="334951"/>
-                  </a:lnTo>
-                  <a:lnTo>
-                    <a:pt x="4941954" y="320736"/>
-                  </a:lnTo>
-                  <a:lnTo>
-                    <a:pt x="4870331" y="306261"/>
-                  </a:lnTo>
-                  <a:lnTo>
-                    <a:pt x="4798709" y="291523"/>
-                  </a:lnTo>
-                  <a:lnTo>
-                    <a:pt x="4727086" y="282654"/>
-                  </a:lnTo>
-                  <a:lnTo>
-                    <a:pt x="4655464" y="278959"/>
-                  </a:lnTo>
-                  <a:lnTo>
-                    <a:pt x="4583841" y="275248"/>
-                  </a:lnTo>
-                  <a:lnTo>
-                    <a:pt x="4512219" y="271520"/>
-                  </a:lnTo>
-                  <a:lnTo>
-                    <a:pt x="4440596" y="267776"/>
-                  </a:lnTo>
-                  <a:lnTo>
-                    <a:pt x="4368974" y="264015"/>
-                  </a:lnTo>
-                  <a:lnTo>
-                    <a:pt x="4297351" y="260238"/>
-                  </a:lnTo>
-                  <a:lnTo>
-                    <a:pt x="4225729" y="256443"/>
-                  </a:lnTo>
-                  <a:lnTo>
-                    <a:pt x="4154106" y="252632"/>
-                  </a:lnTo>
-                  <a:lnTo>
-                    <a:pt x="4082483" y="248804"/>
-                  </a:lnTo>
-                  <a:lnTo>
-                    <a:pt x="4010861" y="244959"/>
-                  </a:lnTo>
-                  <a:lnTo>
-                    <a:pt x="3939238" y="241097"/>
-                  </a:lnTo>
-                  <a:lnTo>
-                    <a:pt x="3867616" y="237217"/>
-                  </a:lnTo>
-                  <a:lnTo>
-                    <a:pt x="3795993" y="233321"/>
-                  </a:lnTo>
-                  <a:lnTo>
-                    <a:pt x="3724371" y="229407"/>
-                  </a:lnTo>
-                  <a:lnTo>
-                    <a:pt x="3652748" y="225475"/>
-                  </a:lnTo>
-                  <a:lnTo>
-                    <a:pt x="3581126" y="221527"/>
-                  </a:lnTo>
-                  <a:lnTo>
-                    <a:pt x="3509503" y="217560"/>
-                  </a:lnTo>
-                  <a:lnTo>
-                    <a:pt x="3437881" y="213576"/>
-                  </a:lnTo>
-                  <a:lnTo>
-                    <a:pt x="3366258" y="209575"/>
-                  </a:lnTo>
-                  <a:lnTo>
-                    <a:pt x="3294636" y="205555"/>
-                  </a:lnTo>
-                  <a:lnTo>
-                    <a:pt x="3223013" y="201518"/>
-                  </a:lnTo>
-                  <a:lnTo>
-                    <a:pt x="3151391" y="197463"/>
-                  </a:lnTo>
-                  <a:lnTo>
-                    <a:pt x="3079768" y="193389"/>
-                  </a:lnTo>
-                  <a:lnTo>
-                    <a:pt x="3008146" y="189298"/>
-                  </a:lnTo>
-                  <a:lnTo>
-                    <a:pt x="2936523" y="185188"/>
-                  </a:lnTo>
-                  <a:lnTo>
-                    <a:pt x="2864901" y="181061"/>
-                  </a:lnTo>
-                  <a:lnTo>
-                    <a:pt x="2793278" y="176914"/>
-                  </a:lnTo>
-                  <a:lnTo>
-                    <a:pt x="2721655" y="172750"/>
-                  </a:lnTo>
-                  <a:lnTo>
-                    <a:pt x="2650033" y="168567"/>
-                  </a:lnTo>
-                  <a:lnTo>
-                    <a:pt x="2578410" y="164365"/>
-                  </a:lnTo>
-                  <a:lnTo>
-                    <a:pt x="2506788" y="160145"/>
-                  </a:lnTo>
-                  <a:lnTo>
-                    <a:pt x="2435165" y="155906"/>
-                  </a:lnTo>
-                  <a:lnTo>
-                    <a:pt x="2363543" y="151648"/>
-                  </a:lnTo>
-                  <a:lnTo>
-                    <a:pt x="2291920" y="147371"/>
-                  </a:lnTo>
-                  <a:lnTo>
-                    <a:pt x="2220298" y="143075"/>
-                  </a:lnTo>
-                  <a:lnTo>
-                    <a:pt x="2148675" y="138760"/>
-                  </a:lnTo>
-                  <a:lnTo>
-                    <a:pt x="2077053" y="134426"/>
-                  </a:lnTo>
-                  <a:lnTo>
-                    <a:pt x="2005430" y="130072"/>
-                  </a:lnTo>
-                  <a:lnTo>
-                    <a:pt x="1933808" y="125700"/>
-                  </a:lnTo>
-                  <a:lnTo>
-                    <a:pt x="1862185" y="121307"/>
-                  </a:lnTo>
-                  <a:lnTo>
-                    <a:pt x="1790563" y="116896"/>
-                  </a:lnTo>
-                  <a:lnTo>
-                    <a:pt x="1718940" y="112464"/>
-                  </a:lnTo>
-                  <a:lnTo>
-                    <a:pt x="1647318" y="108013"/>
-                  </a:lnTo>
-                  <a:lnTo>
-                    <a:pt x="1575695" y="103543"/>
-                  </a:lnTo>
-                  <a:lnTo>
-                    <a:pt x="1504073" y="99052"/>
-                  </a:lnTo>
-                  <a:lnTo>
-                    <a:pt x="1432450" y="94541"/>
-                  </a:lnTo>
-                  <a:lnTo>
-                    <a:pt x="1360827" y="90011"/>
-                  </a:lnTo>
-                  <a:lnTo>
-                    <a:pt x="1289205" y="85460"/>
-                  </a:lnTo>
-                  <a:lnTo>
-                    <a:pt x="1217582" y="80889"/>
-                  </a:lnTo>
-                  <a:lnTo>
-                    <a:pt x="1145960" y="76298"/>
-                  </a:lnTo>
-                  <a:lnTo>
-                    <a:pt x="1074337" y="71686"/>
-                  </a:lnTo>
-                  <a:lnTo>
-                    <a:pt x="1002715" y="67054"/>
-                  </a:lnTo>
-                  <a:lnTo>
-                    <a:pt x="931092" y="62401"/>
-                  </a:lnTo>
-                  <a:lnTo>
-                    <a:pt x="859470" y="57728"/>
-                  </a:lnTo>
-                  <a:lnTo>
-                    <a:pt x="787847" y="53033"/>
-                  </a:lnTo>
-                  <a:lnTo>
-                    <a:pt x="716225" y="48318"/>
-                  </a:lnTo>
-                  <a:lnTo>
-                    <a:pt x="644602" y="43582"/>
-                  </a:lnTo>
-                  <a:lnTo>
-                    <a:pt x="572980" y="38825"/>
-                  </a:lnTo>
-                  <a:lnTo>
-                    <a:pt x="501357" y="34047"/>
-                  </a:lnTo>
-                  <a:lnTo>
-                    <a:pt x="429735" y="29247"/>
-                  </a:lnTo>
-                  <a:lnTo>
-                    <a:pt x="358112" y="24427"/>
-                  </a:lnTo>
-                  <a:lnTo>
-                    <a:pt x="286490" y="19584"/>
-                  </a:lnTo>
-                  <a:lnTo>
-                    <a:pt x="214867" y="14721"/>
-                  </a:lnTo>
-                  <a:lnTo>
-                    <a:pt x="143245" y="9835"/>
-                  </a:lnTo>
-                  <a:lnTo>
-                    <a:pt x="71622" y="4928"/>
+                    <a:pt x="7019007" y="655251"/>
+                  </a:lnTo>
+                  <a:lnTo>
+                    <a:pt x="6947385" y="646660"/>
+                  </a:lnTo>
+                  <a:lnTo>
+                    <a:pt x="6875762" y="637910"/>
+                  </a:lnTo>
+                  <a:lnTo>
+                    <a:pt x="6804139" y="629000"/>
+                  </a:lnTo>
+                  <a:lnTo>
+                    <a:pt x="6732517" y="619927"/>
+                  </a:lnTo>
+                  <a:lnTo>
+                    <a:pt x="6660894" y="610687"/>
+                  </a:lnTo>
+                  <a:lnTo>
+                    <a:pt x="6589272" y="601277"/>
+                  </a:lnTo>
+                  <a:lnTo>
+                    <a:pt x="6517649" y="591695"/>
+                  </a:lnTo>
+                  <a:lnTo>
+                    <a:pt x="6446027" y="581937"/>
+                  </a:lnTo>
+                  <a:lnTo>
+                    <a:pt x="6374404" y="571999"/>
+                  </a:lnTo>
+                  <a:lnTo>
+                    <a:pt x="6302782" y="561879"/>
+                  </a:lnTo>
+                  <a:lnTo>
+                    <a:pt x="6231159" y="551574"/>
+                  </a:lnTo>
+                  <a:lnTo>
+                    <a:pt x="6159537" y="541079"/>
+                  </a:lnTo>
+                  <a:lnTo>
+                    <a:pt x="6087914" y="530391"/>
+                  </a:lnTo>
+                  <a:lnTo>
+                    <a:pt x="6016292" y="519507"/>
+                  </a:lnTo>
+                  <a:lnTo>
+                    <a:pt x="5944669" y="508424"/>
+                  </a:lnTo>
+                  <a:lnTo>
+                    <a:pt x="5873047" y="497137"/>
+                  </a:lnTo>
+                  <a:lnTo>
+                    <a:pt x="5801424" y="485642"/>
+                  </a:lnTo>
+                  <a:lnTo>
+                    <a:pt x="5729802" y="473937"/>
+                  </a:lnTo>
+                  <a:lnTo>
+                    <a:pt x="5658179" y="462017"/>
+                  </a:lnTo>
+                  <a:lnTo>
+                    <a:pt x="5586557" y="449878"/>
+                  </a:lnTo>
+                  <a:lnTo>
+                    <a:pt x="5514934" y="437516"/>
+                  </a:lnTo>
+                  <a:lnTo>
+                    <a:pt x="5443311" y="424927"/>
+                  </a:lnTo>
+                  <a:lnTo>
+                    <a:pt x="5371689" y="412107"/>
+                  </a:lnTo>
+                  <a:lnTo>
+                    <a:pt x="5300066" y="399052"/>
+                  </a:lnTo>
+                  <a:lnTo>
+                    <a:pt x="5228444" y="385757"/>
+                  </a:lnTo>
+                  <a:lnTo>
+                    <a:pt x="5156821" y="372218"/>
+                  </a:lnTo>
+                  <a:lnTo>
+                    <a:pt x="5085199" y="358431"/>
+                  </a:lnTo>
+                  <a:lnTo>
+                    <a:pt x="5013576" y="344390"/>
+                  </a:lnTo>
+                  <a:lnTo>
+                    <a:pt x="4941954" y="330092"/>
+                  </a:lnTo>
+                  <a:lnTo>
+                    <a:pt x="4870331" y="315531"/>
+                  </a:lnTo>
+                  <a:lnTo>
+                    <a:pt x="4798709" y="300702"/>
+                  </a:lnTo>
+                  <a:lnTo>
+                    <a:pt x="4727086" y="291736"/>
+                  </a:lnTo>
+                  <a:lnTo>
+                    <a:pt x="4655464" y="287938"/>
+                  </a:lnTo>
+                  <a:lnTo>
+                    <a:pt x="4583841" y="284124"/>
+                  </a:lnTo>
+                  <a:lnTo>
+                    <a:pt x="4512219" y="280291"/>
+                  </a:lnTo>
+                  <a:lnTo>
+                    <a:pt x="4440596" y="276441"/>
+                  </a:lnTo>
+                  <a:lnTo>
+                    <a:pt x="4368974" y="272574"/>
+                  </a:lnTo>
+                  <a:lnTo>
+                    <a:pt x="4297351" y="268689"/>
+                  </a:lnTo>
+                  <a:lnTo>
+                    <a:pt x="4225729" y="264786"/>
+                  </a:lnTo>
+                  <a:lnTo>
+                    <a:pt x="4154106" y="260866"/>
+                  </a:lnTo>
+                  <a:lnTo>
+                    <a:pt x="4082483" y="256927"/>
+                  </a:lnTo>
+                  <a:lnTo>
+                    <a:pt x="4010861" y="252971"/>
+                  </a:lnTo>
+                  <a:lnTo>
+                    <a:pt x="3939238" y="248996"/>
+                  </a:lnTo>
+                  <a:lnTo>
+                    <a:pt x="3867616" y="245004"/>
+                  </a:lnTo>
+                  <a:lnTo>
+                    <a:pt x="3795993" y="240993"/>
+                  </a:lnTo>
+                  <a:lnTo>
+                    <a:pt x="3724371" y="236964"/>
+                  </a:lnTo>
+                  <a:lnTo>
+                    <a:pt x="3652748" y="232916"/>
+                  </a:lnTo>
+                  <a:lnTo>
+                    <a:pt x="3581126" y="228850"/>
+                  </a:lnTo>
+                  <a:lnTo>
+                    <a:pt x="3509503" y="224765"/>
+                  </a:lnTo>
+                  <a:lnTo>
+                    <a:pt x="3437881" y="220662"/>
+                  </a:lnTo>
+                  <a:lnTo>
+                    <a:pt x="3366258" y="216540"/>
+                  </a:lnTo>
+                  <a:lnTo>
+                    <a:pt x="3294636" y="212399"/>
+                  </a:lnTo>
+                  <a:lnTo>
+                    <a:pt x="3223013" y="208239"/>
+                  </a:lnTo>
+                  <a:lnTo>
+                    <a:pt x="3151391" y="204060"/>
+                  </a:lnTo>
+                  <a:lnTo>
+                    <a:pt x="3079768" y="199862"/>
+                  </a:lnTo>
+                  <a:lnTo>
+                    <a:pt x="3008146" y="195645"/>
+                  </a:lnTo>
+                  <a:lnTo>
+                    <a:pt x="2936523" y="191409"/>
+                  </a:lnTo>
+                  <a:lnTo>
+                    <a:pt x="2864901" y="187153"/>
+                  </a:lnTo>
+                  <a:lnTo>
+                    <a:pt x="2793278" y="182878"/>
+                  </a:lnTo>
+                  <a:lnTo>
+                    <a:pt x="2721655" y="178583"/>
+                  </a:lnTo>
+                  <a:lnTo>
+                    <a:pt x="2650033" y="174269"/>
+                  </a:lnTo>
+                  <a:lnTo>
+                    <a:pt x="2578410" y="169935"/>
+                  </a:lnTo>
+                  <a:lnTo>
+                    <a:pt x="2506788" y="165581"/>
+                  </a:lnTo>
+                  <a:lnTo>
+                    <a:pt x="2435165" y="161208"/>
+                  </a:lnTo>
+                  <a:lnTo>
+                    <a:pt x="2363543" y="156814"/>
+                  </a:lnTo>
+                  <a:lnTo>
+                    <a:pt x="2291920" y="152400"/>
+                  </a:lnTo>
+                  <a:lnTo>
+                    <a:pt x="2220298" y="147967"/>
+                  </a:lnTo>
+                  <a:lnTo>
+                    <a:pt x="2148675" y="143512"/>
+                  </a:lnTo>
+                  <a:lnTo>
+                    <a:pt x="2077053" y="139038"/>
+                  </a:lnTo>
+                  <a:lnTo>
+                    <a:pt x="2005430" y="134543"/>
+                  </a:lnTo>
+                  <a:lnTo>
+                    <a:pt x="1933808" y="130028"/>
+                  </a:lnTo>
+                  <a:lnTo>
+                    <a:pt x="1862185" y="125492"/>
+                  </a:lnTo>
+                  <a:lnTo>
+                    <a:pt x="1790563" y="120935"/>
+                  </a:lnTo>
+                  <a:lnTo>
+                    <a:pt x="1718940" y="116357"/>
+                  </a:lnTo>
+                  <a:lnTo>
+                    <a:pt x="1647318" y="111759"/>
+                  </a:lnTo>
+                  <a:lnTo>
+                    <a:pt x="1575695" y="107140"/>
+                  </a:lnTo>
+                  <a:lnTo>
+                    <a:pt x="1504073" y="102499"/>
+                  </a:lnTo>
+                  <a:lnTo>
+                    <a:pt x="1432450" y="97837"/>
+                  </a:lnTo>
+                  <a:lnTo>
+                    <a:pt x="1360827" y="93154"/>
+                  </a:lnTo>
+                  <a:lnTo>
+                    <a:pt x="1289205" y="88450"/>
+                  </a:lnTo>
+                  <a:lnTo>
+                    <a:pt x="1217582" y="83724"/>
+                  </a:lnTo>
+                  <a:lnTo>
+                    <a:pt x="1145960" y="78976"/>
+                  </a:lnTo>
+                  <a:lnTo>
+                    <a:pt x="1074337" y="74207"/>
+                  </a:lnTo>
+                  <a:lnTo>
+                    <a:pt x="1002715" y="69416"/>
+                  </a:lnTo>
+                  <a:lnTo>
+                    <a:pt x="931092" y="64603"/>
+                  </a:lnTo>
+                  <a:lnTo>
+                    <a:pt x="859470" y="59769"/>
+                  </a:lnTo>
+                  <a:lnTo>
+                    <a:pt x="787847" y="54912"/>
+                  </a:lnTo>
+                  <a:lnTo>
+                    <a:pt x="716225" y="50033"/>
+                  </a:lnTo>
+                  <a:lnTo>
+                    <a:pt x="644602" y="45131"/>
+                  </a:lnTo>
+                  <a:lnTo>
+                    <a:pt x="572980" y="40208"/>
+                  </a:lnTo>
+                  <a:lnTo>
+                    <a:pt x="501357" y="35261"/>
+                  </a:lnTo>
+                  <a:lnTo>
+                    <a:pt x="429735" y="30293"/>
+                  </a:lnTo>
+                  <a:lnTo>
+                    <a:pt x="358112" y="25301"/>
+                  </a:lnTo>
+                  <a:lnTo>
+                    <a:pt x="286490" y="20287"/>
+                  </a:lnTo>
+                  <a:lnTo>
+                    <a:pt x="214867" y="15250"/>
+                  </a:lnTo>
+                  <a:lnTo>
+                    <a:pt x="143245" y="10189"/>
+                  </a:lnTo>
+                  <a:lnTo>
+                    <a:pt x="71622" y="5106"/>
                   </a:lnTo>
                   <a:lnTo>
                     <a:pt x="0" y="0"/>
@@ -4326,312 +4326,312 @@
           </p:nvSpPr>
           <p:spPr>
             <a:xfrm>
-              <a:off x="1172049" y="3802988"/>
-              <a:ext cx="7090630" cy="1178686"/>
+              <a:off x="1172049" y="3789234"/>
+              <a:ext cx="7090630" cy="1194629"/>
             </a:xfrm>
             <a:custGeom>
               <a:avLst/>
               <a:pathLst>
-                <a:path w="7090630" h="1178686">
+                <a:path w="7090630" h="1194629">
                   <a:moveTo>
                     <a:pt x="0" y="0"/>
                   </a:moveTo>
                   <a:lnTo>
-                    <a:pt x="71622" y="19636"/>
-                  </a:lnTo>
-                  <a:lnTo>
-                    <a:pt x="143245" y="39053"/>
-                  </a:lnTo>
-                  <a:lnTo>
-                    <a:pt x="214867" y="58253"/>
-                  </a:lnTo>
-                  <a:lnTo>
-                    <a:pt x="286490" y="77238"/>
-                  </a:lnTo>
-                  <a:lnTo>
-                    <a:pt x="358112" y="96010"/>
-                  </a:lnTo>
-                  <a:lnTo>
-                    <a:pt x="429735" y="114572"/>
-                  </a:lnTo>
-                  <a:lnTo>
-                    <a:pt x="501357" y="132926"/>
-                  </a:lnTo>
-                  <a:lnTo>
-                    <a:pt x="572980" y="151075"/>
-                  </a:lnTo>
-                  <a:lnTo>
-                    <a:pt x="644602" y="169021"/>
-                  </a:lnTo>
-                  <a:lnTo>
-                    <a:pt x="716225" y="186766"/>
-                  </a:lnTo>
-                  <a:lnTo>
-                    <a:pt x="787847" y="204312"/>
-                  </a:lnTo>
-                  <a:lnTo>
-                    <a:pt x="859470" y="221662"/>
-                  </a:lnTo>
-                  <a:lnTo>
-                    <a:pt x="931092" y="238817"/>
-                  </a:lnTo>
-                  <a:lnTo>
-                    <a:pt x="1002715" y="255781"/>
-                  </a:lnTo>
-                  <a:lnTo>
-                    <a:pt x="1074337" y="272555"/>
-                  </a:lnTo>
-                  <a:lnTo>
-                    <a:pt x="1145960" y="289141"/>
-                  </a:lnTo>
-                  <a:lnTo>
-                    <a:pt x="1217582" y="305541"/>
-                  </a:lnTo>
-                  <a:lnTo>
-                    <a:pt x="1289205" y="321758"/>
-                  </a:lnTo>
-                  <a:lnTo>
-                    <a:pt x="1360827" y="337793"/>
-                  </a:lnTo>
-                  <a:lnTo>
-                    <a:pt x="1432450" y="353648"/>
-                  </a:lnTo>
-                  <a:lnTo>
-                    <a:pt x="1504073" y="369326"/>
-                  </a:lnTo>
-                  <a:lnTo>
-                    <a:pt x="1575695" y="384829"/>
-                  </a:lnTo>
-                  <a:lnTo>
-                    <a:pt x="1647318" y="400158"/>
-                  </a:lnTo>
-                  <a:lnTo>
-                    <a:pt x="1718940" y="415316"/>
-                  </a:lnTo>
-                  <a:lnTo>
-                    <a:pt x="1790563" y="430304"/>
-                  </a:lnTo>
-                  <a:lnTo>
-                    <a:pt x="1862185" y="445124"/>
-                  </a:lnTo>
-                  <a:lnTo>
-                    <a:pt x="1933808" y="459778"/>
-                  </a:lnTo>
-                  <a:lnTo>
-                    <a:pt x="2005430" y="474268"/>
-                  </a:lnTo>
-                  <a:lnTo>
-                    <a:pt x="2077053" y="488596"/>
-                  </a:lnTo>
-                  <a:lnTo>
-                    <a:pt x="2148675" y="502764"/>
-                  </a:lnTo>
-                  <a:lnTo>
-                    <a:pt x="2220298" y="516773"/>
-                  </a:lnTo>
-                  <a:lnTo>
-                    <a:pt x="2291920" y="530625"/>
-                  </a:lnTo>
-                  <a:lnTo>
-                    <a:pt x="2363543" y="544322"/>
-                  </a:lnTo>
-                  <a:lnTo>
-                    <a:pt x="2435165" y="557866"/>
-                  </a:lnTo>
-                  <a:lnTo>
-                    <a:pt x="2506788" y="571258"/>
-                  </a:lnTo>
-                  <a:lnTo>
-                    <a:pt x="2578410" y="584500"/>
-                  </a:lnTo>
-                  <a:lnTo>
-                    <a:pt x="2650033" y="597594"/>
-                  </a:lnTo>
-                  <a:lnTo>
-                    <a:pt x="2721655" y="610542"/>
-                  </a:lnTo>
-                  <a:lnTo>
-                    <a:pt x="2793278" y="623344"/>
-                  </a:lnTo>
-                  <a:lnTo>
-                    <a:pt x="2864901" y="636004"/>
-                  </a:lnTo>
-                  <a:lnTo>
-                    <a:pt x="2936523" y="648521"/>
-                  </a:lnTo>
-                  <a:lnTo>
-                    <a:pt x="3008146" y="660899"/>
-                  </a:lnTo>
-                  <a:lnTo>
-                    <a:pt x="3079768" y="673137"/>
-                  </a:lnTo>
-                  <a:lnTo>
-                    <a:pt x="3151391" y="685239"/>
-                  </a:lnTo>
-                  <a:lnTo>
-                    <a:pt x="3223013" y="697206"/>
-                  </a:lnTo>
-                  <a:lnTo>
-                    <a:pt x="3294636" y="709038"/>
-                  </a:lnTo>
-                  <a:lnTo>
-                    <a:pt x="3366258" y="720738"/>
-                  </a:lnTo>
-                  <a:lnTo>
-                    <a:pt x="3437881" y="732307"/>
-                  </a:lnTo>
-                  <a:lnTo>
-                    <a:pt x="3509503" y="743747"/>
-                  </a:lnTo>
-                  <a:lnTo>
-                    <a:pt x="3581126" y="755058"/>
-                  </a:lnTo>
-                  <a:lnTo>
-                    <a:pt x="3652748" y="766243"/>
-                  </a:lnTo>
-                  <a:lnTo>
-                    <a:pt x="3724371" y="777303"/>
-                  </a:lnTo>
-                  <a:lnTo>
-                    <a:pt x="3795993" y="788239"/>
-                  </a:lnTo>
-                  <a:lnTo>
-                    <a:pt x="3867616" y="799052"/>
-                  </a:lnTo>
-                  <a:lnTo>
-                    <a:pt x="3939238" y="809744"/>
-                  </a:lnTo>
-                  <a:lnTo>
-                    <a:pt x="4010861" y="820317"/>
-                  </a:lnTo>
-                  <a:lnTo>
-                    <a:pt x="4082483" y="830772"/>
-                  </a:lnTo>
-                  <a:lnTo>
-                    <a:pt x="4154106" y="841109"/>
-                  </a:lnTo>
-                  <a:lnTo>
-                    <a:pt x="4225729" y="851330"/>
-                  </a:lnTo>
-                  <a:lnTo>
-                    <a:pt x="4297351" y="861438"/>
-                  </a:lnTo>
-                  <a:lnTo>
-                    <a:pt x="4368974" y="871432"/>
-                  </a:lnTo>
-                  <a:lnTo>
-                    <a:pt x="4440596" y="881314"/>
-                  </a:lnTo>
-                  <a:lnTo>
-                    <a:pt x="4512219" y="891086"/>
-                  </a:lnTo>
-                  <a:lnTo>
-                    <a:pt x="4583841" y="900748"/>
-                  </a:lnTo>
-                  <a:lnTo>
-                    <a:pt x="4655464" y="910302"/>
-                  </a:lnTo>
-                  <a:lnTo>
-                    <a:pt x="4727086" y="919749"/>
-                  </a:lnTo>
-                  <a:lnTo>
-                    <a:pt x="4798709" y="929090"/>
-                  </a:lnTo>
-                  <a:lnTo>
-                    <a:pt x="4870331" y="938327"/>
-                  </a:lnTo>
-                  <a:lnTo>
-                    <a:pt x="4941954" y="947460"/>
-                  </a:lnTo>
-                  <a:lnTo>
-                    <a:pt x="5013576" y="956492"/>
-                  </a:lnTo>
-                  <a:lnTo>
-                    <a:pt x="5085199" y="965422"/>
-                  </a:lnTo>
-                  <a:lnTo>
-                    <a:pt x="5156821" y="974252"/>
-                  </a:lnTo>
-                  <a:lnTo>
-                    <a:pt x="5228444" y="982983"/>
-                  </a:lnTo>
-                  <a:lnTo>
-                    <a:pt x="5300066" y="991617"/>
-                  </a:lnTo>
-                  <a:lnTo>
-                    <a:pt x="5371689" y="1000153"/>
-                  </a:lnTo>
-                  <a:lnTo>
-                    <a:pt x="5443311" y="1008595"/>
-                  </a:lnTo>
-                  <a:lnTo>
-                    <a:pt x="5514934" y="1016942"/>
-                  </a:lnTo>
-                  <a:lnTo>
-                    <a:pt x="5586557" y="1025195"/>
-                  </a:lnTo>
-                  <a:lnTo>
-                    <a:pt x="5658179" y="1033356"/>
-                  </a:lnTo>
-                  <a:lnTo>
-                    <a:pt x="5729802" y="1041426"/>
-                  </a:lnTo>
-                  <a:lnTo>
-                    <a:pt x="5801424" y="1049405"/>
-                  </a:lnTo>
-                  <a:lnTo>
-                    <a:pt x="5873047" y="1057295"/>
-                  </a:lnTo>
-                  <a:lnTo>
-                    <a:pt x="5944669" y="1065097"/>
-                  </a:lnTo>
-                  <a:lnTo>
-                    <a:pt x="6016292" y="1072811"/>
-                  </a:lnTo>
-                  <a:lnTo>
-                    <a:pt x="6087914" y="1080439"/>
-                  </a:lnTo>
-                  <a:lnTo>
-                    <a:pt x="6159537" y="1087982"/>
-                  </a:lnTo>
-                  <a:lnTo>
-                    <a:pt x="6231159" y="1095440"/>
-                  </a:lnTo>
-                  <a:lnTo>
-                    <a:pt x="6302782" y="1102815"/>
-                  </a:lnTo>
-                  <a:lnTo>
-                    <a:pt x="6374404" y="1110107"/>
-                  </a:lnTo>
-                  <a:lnTo>
-                    <a:pt x="6446027" y="1117317"/>
-                  </a:lnTo>
-                  <a:lnTo>
-                    <a:pt x="6517649" y="1124447"/>
-                  </a:lnTo>
-                  <a:lnTo>
-                    <a:pt x="6589272" y="1131497"/>
-                  </a:lnTo>
-                  <a:lnTo>
-                    <a:pt x="6660894" y="1138468"/>
-                  </a:lnTo>
-                  <a:lnTo>
-                    <a:pt x="6732517" y="1145361"/>
-                  </a:lnTo>
-                  <a:lnTo>
-                    <a:pt x="6804139" y="1152177"/>
-                  </a:lnTo>
-                  <a:lnTo>
-                    <a:pt x="6875762" y="1158917"/>
-                  </a:lnTo>
-                  <a:lnTo>
-                    <a:pt x="6947385" y="1165581"/>
-                  </a:lnTo>
-                  <a:lnTo>
-                    <a:pt x="7019007" y="1172170"/>
-                  </a:lnTo>
-                  <a:lnTo>
-                    <a:pt x="7090630" y="1178686"/>
+                    <a:pt x="71622" y="19995"/>
+                  </a:lnTo>
+                  <a:lnTo>
+                    <a:pt x="143245" y="39765"/>
+                  </a:lnTo>
+                  <a:lnTo>
+                    <a:pt x="214867" y="59312"/>
+                  </a:lnTo>
+                  <a:lnTo>
+                    <a:pt x="286490" y="78637"/>
+                  </a:lnTo>
+                  <a:lnTo>
+                    <a:pt x="358112" y="97743"/>
+                  </a:lnTo>
+                  <a:lnTo>
+                    <a:pt x="429735" y="116634"/>
+                  </a:lnTo>
+                  <a:lnTo>
+                    <a:pt x="501357" y="135311"/>
+                  </a:lnTo>
+                  <a:lnTo>
+                    <a:pt x="572980" y="153776"/>
+                  </a:lnTo>
+                  <a:lnTo>
+                    <a:pt x="644602" y="172033"/>
+                  </a:lnTo>
+                  <a:lnTo>
+                    <a:pt x="716225" y="190083"/>
+                  </a:lnTo>
+                  <a:lnTo>
+                    <a:pt x="787847" y="207930"/>
+                  </a:lnTo>
+                  <a:lnTo>
+                    <a:pt x="859470" y="225574"/>
+                  </a:lnTo>
+                  <a:lnTo>
+                    <a:pt x="931092" y="243019"/>
+                  </a:lnTo>
+                  <a:lnTo>
+                    <a:pt x="1002715" y="260266"/>
+                  </a:lnTo>
+                  <a:lnTo>
+                    <a:pt x="1074337" y="277319"/>
+                  </a:lnTo>
+                  <a:lnTo>
+                    <a:pt x="1145960" y="294178"/>
+                  </a:lnTo>
+                  <a:lnTo>
+                    <a:pt x="1217582" y="310847"/>
+                  </a:lnTo>
+                  <a:lnTo>
+                    <a:pt x="1289205" y="327327"/>
+                  </a:lnTo>
+                  <a:lnTo>
+                    <a:pt x="1360827" y="343621"/>
+                  </a:lnTo>
+                  <a:lnTo>
+                    <a:pt x="1432450" y="359731"/>
+                  </a:lnTo>
+                  <a:lnTo>
+                    <a:pt x="1504073" y="375658"/>
+                  </a:lnTo>
+                  <a:lnTo>
+                    <a:pt x="1575695" y="391406"/>
+                  </a:lnTo>
+                  <a:lnTo>
+                    <a:pt x="1647318" y="406975"/>
+                  </a:lnTo>
+                  <a:lnTo>
+                    <a:pt x="1718940" y="422368"/>
+                  </a:lnTo>
+                  <a:lnTo>
+                    <a:pt x="1790563" y="437587"/>
+                  </a:lnTo>
+                  <a:lnTo>
+                    <a:pt x="1862185" y="452634"/>
+                  </a:lnTo>
+                  <a:lnTo>
+                    <a:pt x="1933808" y="467511"/>
+                  </a:lnTo>
+                  <a:lnTo>
+                    <a:pt x="2005430" y="482219"/>
+                  </a:lnTo>
+                  <a:lnTo>
+                    <a:pt x="2077053" y="496762"/>
+                  </a:lnTo>
+                  <a:lnTo>
+                    <a:pt x="2148675" y="511139"/>
+                  </a:lnTo>
+                  <a:lnTo>
+                    <a:pt x="2220298" y="525354"/>
+                  </a:lnTo>
+                  <a:lnTo>
+                    <a:pt x="2291920" y="539409"/>
+                  </a:lnTo>
+                  <a:lnTo>
+                    <a:pt x="2363543" y="553304"/>
+                  </a:lnTo>
+                  <a:lnTo>
+                    <a:pt x="2435165" y="567042"/>
+                  </a:lnTo>
+                  <a:lnTo>
+                    <a:pt x="2506788" y="580625"/>
+                  </a:lnTo>
+                  <a:lnTo>
+                    <a:pt x="2578410" y="594054"/>
+                  </a:lnTo>
+                  <a:lnTo>
+                    <a:pt x="2650033" y="607331"/>
+                  </a:lnTo>
+                  <a:lnTo>
+                    <a:pt x="2721655" y="620459"/>
+                  </a:lnTo>
+                  <a:lnTo>
+                    <a:pt x="2793278" y="633437"/>
+                  </a:lnTo>
+                  <a:lnTo>
+                    <a:pt x="2864901" y="646269"/>
+                  </a:lnTo>
+                  <a:lnTo>
+                    <a:pt x="2936523" y="658956"/>
+                  </a:lnTo>
+                  <a:lnTo>
+                    <a:pt x="3008146" y="671499"/>
+                  </a:lnTo>
+                  <a:lnTo>
+                    <a:pt x="3079768" y="683901"/>
+                  </a:lnTo>
+                  <a:lnTo>
+                    <a:pt x="3151391" y="696162"/>
+                  </a:lnTo>
+                  <a:lnTo>
+                    <a:pt x="3223013" y="708284"/>
+                  </a:lnTo>
+                  <a:lnTo>
+                    <a:pt x="3294636" y="720270"/>
+                  </a:lnTo>
+                  <a:lnTo>
+                    <a:pt x="3366258" y="732120"/>
+                  </a:lnTo>
+                  <a:lnTo>
+                    <a:pt x="3437881" y="743835"/>
+                  </a:lnTo>
+                  <a:lnTo>
+                    <a:pt x="3509503" y="755419"/>
+                  </a:lnTo>
+                  <a:lnTo>
+                    <a:pt x="3581126" y="766871"/>
+                  </a:lnTo>
+                  <a:lnTo>
+                    <a:pt x="3652748" y="778194"/>
+                  </a:lnTo>
+                  <a:lnTo>
+                    <a:pt x="3724371" y="789389"/>
+                  </a:lnTo>
+                  <a:lnTo>
+                    <a:pt x="3795993" y="800457"/>
+                  </a:lnTo>
+                  <a:lnTo>
+                    <a:pt x="3867616" y="811400"/>
+                  </a:lnTo>
+                  <a:lnTo>
+                    <a:pt x="3939238" y="822219"/>
+                  </a:lnTo>
+                  <a:lnTo>
+                    <a:pt x="4010861" y="832916"/>
+                  </a:lnTo>
+                  <a:lnTo>
+                    <a:pt x="4082483" y="843491"/>
+                  </a:lnTo>
+                  <a:lnTo>
+                    <a:pt x="4154106" y="853948"/>
+                  </a:lnTo>
+                  <a:lnTo>
+                    <a:pt x="4225729" y="864286"/>
+                  </a:lnTo>
+                  <a:lnTo>
+                    <a:pt x="4297351" y="874507"/>
+                  </a:lnTo>
+                  <a:lnTo>
+                    <a:pt x="4368974" y="884612"/>
+                  </a:lnTo>
+                  <a:lnTo>
+                    <a:pt x="4440596" y="894603"/>
+                  </a:lnTo>
+                  <a:lnTo>
+                    <a:pt x="4512219" y="904481"/>
+                  </a:lnTo>
+                  <a:lnTo>
+                    <a:pt x="4583841" y="914248"/>
+                  </a:lnTo>
+                  <a:lnTo>
+                    <a:pt x="4655464" y="923904"/>
+                  </a:lnTo>
+                  <a:lnTo>
+                    <a:pt x="4727086" y="933451"/>
+                  </a:lnTo>
+                  <a:lnTo>
+                    <a:pt x="4798709" y="942889"/>
+                  </a:lnTo>
+                  <a:lnTo>
+                    <a:pt x="4870331" y="952221"/>
+                  </a:lnTo>
+                  <a:lnTo>
+                    <a:pt x="4941954" y="961448"/>
+                  </a:lnTo>
+                  <a:lnTo>
+                    <a:pt x="5013576" y="970570"/>
+                  </a:lnTo>
+                  <a:lnTo>
+                    <a:pt x="5085199" y="979589"/>
+                  </a:lnTo>
+                  <a:lnTo>
+                    <a:pt x="5156821" y="988506"/>
+                  </a:lnTo>
+                  <a:lnTo>
+                    <a:pt x="5228444" y="997322"/>
+                  </a:lnTo>
+                  <a:lnTo>
+                    <a:pt x="5300066" y="1006039"/>
+                  </a:lnTo>
+                  <a:lnTo>
+                    <a:pt x="5371689" y="1014656"/>
+                  </a:lnTo>
+                  <a:lnTo>
+                    <a:pt x="5443311" y="1023177"/>
+                  </a:lnTo>
+                  <a:lnTo>
+                    <a:pt x="5514934" y="1031601"/>
+                  </a:lnTo>
+                  <a:lnTo>
+                    <a:pt x="5586557" y="1039930"/>
+                  </a:lnTo>
+                  <a:lnTo>
+                    <a:pt x="5658179" y="1048164"/>
+                  </a:lnTo>
+                  <a:lnTo>
+                    <a:pt x="5729802" y="1056305"/>
+                  </a:lnTo>
+                  <a:lnTo>
+                    <a:pt x="5801424" y="1064355"/>
+                  </a:lnTo>
+                  <a:lnTo>
+                    <a:pt x="5873047" y="1072313"/>
+                  </a:lnTo>
+                  <a:lnTo>
+                    <a:pt x="5944669" y="1080181"/>
+                  </a:lnTo>
+                  <a:lnTo>
+                    <a:pt x="6016292" y="1087961"/>
+                  </a:lnTo>
+                  <a:lnTo>
+                    <a:pt x="6087914" y="1095652"/>
+                  </a:lnTo>
+                  <a:lnTo>
+                    <a:pt x="6159537" y="1103256"/>
+                  </a:lnTo>
+                  <a:lnTo>
+                    <a:pt x="6231159" y="1110775"/>
+                  </a:lnTo>
+                  <a:lnTo>
+                    <a:pt x="6302782" y="1118208"/>
+                  </a:lnTo>
+                  <a:lnTo>
+                    <a:pt x="6374404" y="1125557"/>
+                  </a:lnTo>
+                  <a:lnTo>
+                    <a:pt x="6446027" y="1132823"/>
+                  </a:lnTo>
+                  <a:lnTo>
+                    <a:pt x="6517649" y="1140007"/>
+                  </a:lnTo>
+                  <a:lnTo>
+                    <a:pt x="6589272" y="1147110"/>
+                  </a:lnTo>
+                  <a:lnTo>
+                    <a:pt x="6660894" y="1154132"/>
+                  </a:lnTo>
+                  <a:lnTo>
+                    <a:pt x="6732517" y="1161075"/>
+                  </a:lnTo>
+                  <a:lnTo>
+                    <a:pt x="6804139" y="1167939"/>
+                  </a:lnTo>
+                  <a:lnTo>
+                    <a:pt x="6875762" y="1174726"/>
+                  </a:lnTo>
+                  <a:lnTo>
+                    <a:pt x="6947385" y="1181436"/>
+                  </a:lnTo>
+                  <a:lnTo>
+                    <a:pt x="7019007" y="1188070"/>
+                  </a:lnTo>
+                  <a:lnTo>
+                    <a:pt x="7090630" y="1194629"/>
                   </a:lnTo>
                 </a:path>
               </a:pathLst>
@@ -5371,7 +5371,7 @@
                   <a:latin typeface="Helvetica"/>
                   <a:cs typeface="Helvetica"/>
                 </a:rPr>
-                <a:t>subHR per 10 mL/min decline: 1.15 (1.06-1.25), p_Bonf = 0.007 (n = 6)  |  per IQR decline (Δ = 23.3): 1.37 (1.13-1.67)  |  IQR: [-12.8, 10.5]</a:t>
+                <a:t>subHR per 10 mL/min decline: 1.15 (1.06-1.25), p_Bonf = 0.006 (n = 6)  |  per IQR decline (Δ = 23.3): 1.38 (1.14-1.67)  |  IQR: [-12.8, 10.5]</a:t>
               </a:r>
             </a:p>
           </p:txBody>
